--- a/TaskMate_Presentasi_5_Slide.pptx
+++ b/TaskMate_Presentasi_5_Slide.pptx
@@ -5,13 +5,13 @@
     <p:sldMasterId id="2147483648" r:id="rId1"/>
   </p:sldMasterIdLst>
   <p:sldIdLst>
-    <p:sldId id="256" r:id="rId7"/>
-    <p:sldId id="257" r:id="rId8"/>
-    <p:sldId id="258" r:id="rId9"/>
-    <p:sldId id="259" r:id="rId10"/>
-    <p:sldId id="260" r:id="rId11"/>
+    <p:sldId id="256" r:id="rId2"/>
+    <p:sldId id="257" r:id="rId3"/>
+    <p:sldId id="258" r:id="rId4"/>
+    <p:sldId id="259" r:id="rId5"/>
+    <p:sldId id="260" r:id="rId6"/>
   </p:sldIdLst>
-  <p:sldSz cx="12191695" cy="6858000" type="screen4x3"/>
+  <p:sldSz cx="12192000" cy="6858000"/>
   <p:notesSz cx="6858000" cy="9144000"/>
   <p:defaultTextStyle>
     <a:defPPr>
@@ -108,6 +108,22 @@
       </a:defRPr>
     </a:lvl9pPr>
   </p:defaultTextStyle>
+  <p:extLst>
+    <p:ext uri="{EFAFB233-063F-42B5-8137-9DF3F51BA10A}">
+      <p15:sldGuideLst xmlns:p15="http://schemas.microsoft.com/office/powerpoint/2012/main">
+        <p15:guide id="1" orient="horz" pos="2160">
+          <p15:clr>
+            <a:srgbClr val="A4A3A4"/>
+          </p15:clr>
+        </p15:guide>
+        <p15:guide id="2" pos="2880">
+          <p15:clr>
+            <a:srgbClr val="A4A3A4"/>
+          </p15:clr>
+        </p15:guide>
+      </p15:sldGuideLst>
+    </p:ext>
+  </p:extLst>
 </p:presentation>
 </file>
 
@@ -149,10 +165,9 @@
           <a:lstStyle/>
           <a:p>
             <a:r>
-              <a:rPr lang="en-US" smtClean="0"/>
+              <a:rPr lang="en-US"/>
               <a:t>Click to edit Master title style</a:t>
             </a:r>
-            <a:endParaRPr lang="en-US"/>
           </a:p>
         </p:txBody>
       </p:sp>
@@ -268,10 +283,9 @@
           </a:lstStyle>
           <a:p>
             <a:r>
-              <a:rPr lang="en-US" smtClean="0"/>
+              <a:rPr lang="en-US"/>
               <a:t>Click to edit Master subtitle style</a:t>
             </a:r>
-            <a:endParaRPr lang="en-US"/>
           </a:p>
         </p:txBody>
       </p:sp>
@@ -292,7 +306,7 @@
           <a:p>
             <a:fld id="{5BCAD085-E8A6-8845-BD4E-CB4CCA059FC4}" type="datetimeFigureOut">
               <a:rPr lang="en-US" smtClean="0"/>
-              <a:t>1/27/13</a:t>
+              <a:t>7/28/2026</a:t>
             </a:fld>
             <a:endParaRPr lang="en-US"/>
           </a:p>
@@ -386,10 +400,9 @@
           <a:lstStyle/>
           <a:p>
             <a:r>
-              <a:rPr lang="en-US" smtClean="0"/>
+              <a:rPr lang="en-US"/>
               <a:t>Click to edit Master title style</a:t>
             </a:r>
-            <a:endParaRPr lang="en-US"/>
           </a:p>
         </p:txBody>
       </p:sp>
@@ -410,38 +423,37 @@
           <a:p>
             <a:pPr lvl="0"/>
             <a:r>
-              <a:rPr lang="en-US" smtClean="0"/>
+              <a:rPr lang="en-US"/>
               <a:t>Click to edit Master text styles</a:t>
             </a:r>
           </a:p>
           <a:p>
             <a:pPr lvl="1"/>
             <a:r>
-              <a:rPr lang="en-US" smtClean="0"/>
+              <a:rPr lang="en-US"/>
               <a:t>Second level</a:t>
             </a:r>
           </a:p>
           <a:p>
             <a:pPr lvl="2"/>
             <a:r>
-              <a:rPr lang="en-US" smtClean="0"/>
+              <a:rPr lang="en-US"/>
               <a:t>Third level</a:t>
             </a:r>
           </a:p>
           <a:p>
             <a:pPr lvl="3"/>
             <a:r>
-              <a:rPr lang="en-US" smtClean="0"/>
+              <a:rPr lang="en-US"/>
               <a:t>Fourth level</a:t>
             </a:r>
           </a:p>
           <a:p>
             <a:pPr lvl="4"/>
             <a:r>
-              <a:rPr lang="en-US" smtClean="0"/>
+              <a:rPr lang="en-US"/>
               <a:t>Fifth level</a:t>
             </a:r>
-            <a:endParaRPr lang="en-US"/>
           </a:p>
         </p:txBody>
       </p:sp>
@@ -462,7 +474,7 @@
           <a:p>
             <a:fld id="{5BCAD085-E8A6-8845-BD4E-CB4CCA059FC4}" type="datetimeFigureOut">
               <a:rPr lang="en-US" smtClean="0"/>
-              <a:t>1/27/13</a:t>
+              <a:t>7/28/2026</a:t>
             </a:fld>
             <a:endParaRPr lang="en-US"/>
           </a:p>
@@ -561,10 +573,9 @@
           <a:lstStyle/>
           <a:p>
             <a:r>
-              <a:rPr lang="en-US" smtClean="0"/>
+              <a:rPr lang="en-US"/>
               <a:t>Click to edit Master title style</a:t>
             </a:r>
-            <a:endParaRPr lang="en-US"/>
           </a:p>
         </p:txBody>
       </p:sp>
@@ -590,38 +601,37 @@
           <a:p>
             <a:pPr lvl="0"/>
             <a:r>
-              <a:rPr lang="en-US" smtClean="0"/>
+              <a:rPr lang="en-US"/>
               <a:t>Click to edit Master text styles</a:t>
             </a:r>
           </a:p>
           <a:p>
             <a:pPr lvl="1"/>
             <a:r>
-              <a:rPr lang="en-US" smtClean="0"/>
+              <a:rPr lang="en-US"/>
               <a:t>Second level</a:t>
             </a:r>
           </a:p>
           <a:p>
             <a:pPr lvl="2"/>
             <a:r>
-              <a:rPr lang="en-US" smtClean="0"/>
+              <a:rPr lang="en-US"/>
               <a:t>Third level</a:t>
             </a:r>
           </a:p>
           <a:p>
             <a:pPr lvl="3"/>
             <a:r>
-              <a:rPr lang="en-US" smtClean="0"/>
+              <a:rPr lang="en-US"/>
               <a:t>Fourth level</a:t>
             </a:r>
           </a:p>
           <a:p>
             <a:pPr lvl="4"/>
             <a:r>
-              <a:rPr lang="en-US" smtClean="0"/>
+              <a:rPr lang="en-US"/>
               <a:t>Fifth level</a:t>
             </a:r>
-            <a:endParaRPr lang="en-US"/>
           </a:p>
         </p:txBody>
       </p:sp>
@@ -642,7 +652,7 @@
           <a:p>
             <a:fld id="{5BCAD085-E8A6-8845-BD4E-CB4CCA059FC4}" type="datetimeFigureOut">
               <a:rPr lang="en-US" smtClean="0"/>
-              <a:t>1/27/13</a:t>
+              <a:t>7/28/2026</a:t>
             </a:fld>
             <a:endParaRPr lang="en-US"/>
           </a:p>
@@ -736,10 +746,9 @@
           <a:lstStyle/>
           <a:p>
             <a:r>
-              <a:rPr lang="en-US" smtClean="0"/>
+              <a:rPr lang="en-US"/>
               <a:t>Click to edit Master title style</a:t>
             </a:r>
-            <a:endParaRPr lang="en-US"/>
           </a:p>
         </p:txBody>
       </p:sp>
@@ -760,38 +769,37 @@
           <a:p>
             <a:pPr lvl="0"/>
             <a:r>
-              <a:rPr lang="en-US" smtClean="0"/>
+              <a:rPr lang="en-US"/>
               <a:t>Click to edit Master text styles</a:t>
             </a:r>
           </a:p>
           <a:p>
             <a:pPr lvl="1"/>
             <a:r>
-              <a:rPr lang="en-US" smtClean="0"/>
+              <a:rPr lang="en-US"/>
               <a:t>Second level</a:t>
             </a:r>
           </a:p>
           <a:p>
             <a:pPr lvl="2"/>
             <a:r>
-              <a:rPr lang="en-US" smtClean="0"/>
+              <a:rPr lang="en-US"/>
               <a:t>Third level</a:t>
             </a:r>
           </a:p>
           <a:p>
             <a:pPr lvl="3"/>
             <a:r>
-              <a:rPr lang="en-US" smtClean="0"/>
+              <a:rPr lang="en-US"/>
               <a:t>Fourth level</a:t>
             </a:r>
           </a:p>
           <a:p>
             <a:pPr lvl="4"/>
             <a:r>
-              <a:rPr lang="en-US" smtClean="0"/>
+              <a:rPr lang="en-US"/>
               <a:t>Fifth level</a:t>
             </a:r>
-            <a:endParaRPr lang="en-US"/>
           </a:p>
         </p:txBody>
       </p:sp>
@@ -812,7 +820,7 @@
           <a:p>
             <a:fld id="{5BCAD085-E8A6-8845-BD4E-CB4CCA059FC4}" type="datetimeFigureOut">
               <a:rPr lang="en-US" smtClean="0"/>
-              <a:t>1/27/13</a:t>
+              <a:t>7/28/2026</a:t>
             </a:fld>
             <a:endParaRPr lang="en-US"/>
           </a:p>
@@ -915,10 +923,9 @@
           </a:lstStyle>
           <a:p>
             <a:r>
-              <a:rPr lang="en-US" smtClean="0"/>
+              <a:rPr lang="en-US"/>
               <a:t>Click to edit Master title style</a:t>
             </a:r>
-            <a:endParaRPr lang="en-US"/>
           </a:p>
         </p:txBody>
       </p:sp>
@@ -1035,7 +1042,7 @@
           <a:p>
             <a:pPr lvl="0"/>
             <a:r>
-              <a:rPr lang="en-US" smtClean="0"/>
+              <a:rPr lang="en-US"/>
               <a:t>Click to edit Master text styles</a:t>
             </a:r>
           </a:p>
@@ -1058,7 +1065,7 @@
           <a:p>
             <a:fld id="{5BCAD085-E8A6-8845-BD4E-CB4CCA059FC4}" type="datetimeFigureOut">
               <a:rPr lang="en-US" smtClean="0"/>
-              <a:t>1/27/13</a:t>
+              <a:t>7/28/2026</a:t>
             </a:fld>
             <a:endParaRPr lang="en-US"/>
           </a:p>
@@ -1152,10 +1159,9 @@
           <a:lstStyle/>
           <a:p>
             <a:r>
-              <a:rPr lang="en-US" smtClean="0"/>
+              <a:rPr lang="en-US"/>
               <a:t>Click to edit Master title style</a:t>
             </a:r>
-            <a:endParaRPr lang="en-US"/>
           </a:p>
         </p:txBody>
       </p:sp>
@@ -1209,38 +1215,37 @@
           <a:p>
             <a:pPr lvl="0"/>
             <a:r>
-              <a:rPr lang="en-US" smtClean="0"/>
+              <a:rPr lang="en-US"/>
               <a:t>Click to edit Master text styles</a:t>
             </a:r>
           </a:p>
           <a:p>
             <a:pPr lvl="1"/>
             <a:r>
-              <a:rPr lang="en-US" smtClean="0"/>
+              <a:rPr lang="en-US"/>
               <a:t>Second level</a:t>
             </a:r>
           </a:p>
           <a:p>
             <a:pPr lvl="2"/>
             <a:r>
-              <a:rPr lang="en-US" smtClean="0"/>
+              <a:rPr lang="en-US"/>
               <a:t>Third level</a:t>
             </a:r>
           </a:p>
           <a:p>
             <a:pPr lvl="3"/>
             <a:r>
-              <a:rPr lang="en-US" smtClean="0"/>
+              <a:rPr lang="en-US"/>
               <a:t>Fourth level</a:t>
             </a:r>
           </a:p>
           <a:p>
             <a:pPr lvl="4"/>
             <a:r>
-              <a:rPr lang="en-US" smtClean="0"/>
+              <a:rPr lang="en-US"/>
               <a:t>Fifth level</a:t>
             </a:r>
-            <a:endParaRPr lang="en-US"/>
           </a:p>
         </p:txBody>
       </p:sp>
@@ -1294,38 +1299,37 @@
           <a:p>
             <a:pPr lvl="0"/>
             <a:r>
-              <a:rPr lang="en-US" smtClean="0"/>
+              <a:rPr lang="en-US"/>
               <a:t>Click to edit Master text styles</a:t>
             </a:r>
           </a:p>
           <a:p>
             <a:pPr lvl="1"/>
             <a:r>
-              <a:rPr lang="en-US" smtClean="0"/>
+              <a:rPr lang="en-US"/>
               <a:t>Second level</a:t>
             </a:r>
           </a:p>
           <a:p>
             <a:pPr lvl="2"/>
             <a:r>
-              <a:rPr lang="en-US" smtClean="0"/>
+              <a:rPr lang="en-US"/>
               <a:t>Third level</a:t>
             </a:r>
           </a:p>
           <a:p>
             <a:pPr lvl="3"/>
             <a:r>
-              <a:rPr lang="en-US" smtClean="0"/>
+              <a:rPr lang="en-US"/>
               <a:t>Fourth level</a:t>
             </a:r>
           </a:p>
           <a:p>
             <a:pPr lvl="4"/>
             <a:r>
-              <a:rPr lang="en-US" smtClean="0"/>
+              <a:rPr lang="en-US"/>
               <a:t>Fifth level</a:t>
             </a:r>
-            <a:endParaRPr lang="en-US"/>
           </a:p>
         </p:txBody>
       </p:sp>
@@ -1346,7 +1350,7 @@
           <a:p>
             <a:fld id="{5BCAD085-E8A6-8845-BD4E-CB4CCA059FC4}" type="datetimeFigureOut">
               <a:rPr lang="en-US" smtClean="0"/>
-              <a:t>1/27/13</a:t>
+              <a:t>7/28/2026</a:t>
             </a:fld>
             <a:endParaRPr lang="en-US"/>
           </a:p>
@@ -1444,10 +1448,9 @@
           </a:lstStyle>
           <a:p>
             <a:r>
-              <a:rPr lang="en-US" smtClean="0"/>
+              <a:rPr lang="en-US"/>
               <a:t>Click to edit Master title style</a:t>
             </a:r>
-            <a:endParaRPr lang="en-US"/>
           </a:p>
         </p:txBody>
       </p:sp>
@@ -1510,7 +1513,7 @@
           <a:p>
             <a:pPr lvl="0"/>
             <a:r>
-              <a:rPr lang="en-US" smtClean="0"/>
+              <a:rPr lang="en-US"/>
               <a:t>Click to edit Master text styles</a:t>
             </a:r>
           </a:p>
@@ -1566,38 +1569,37 @@
           <a:p>
             <a:pPr lvl="0"/>
             <a:r>
-              <a:rPr lang="en-US" smtClean="0"/>
+              <a:rPr lang="en-US"/>
               <a:t>Click to edit Master text styles</a:t>
             </a:r>
           </a:p>
           <a:p>
             <a:pPr lvl="1"/>
             <a:r>
-              <a:rPr lang="en-US" smtClean="0"/>
+              <a:rPr lang="en-US"/>
               <a:t>Second level</a:t>
             </a:r>
           </a:p>
           <a:p>
             <a:pPr lvl="2"/>
             <a:r>
-              <a:rPr lang="en-US" smtClean="0"/>
+              <a:rPr lang="en-US"/>
               <a:t>Third level</a:t>
             </a:r>
           </a:p>
           <a:p>
             <a:pPr lvl="3"/>
             <a:r>
-              <a:rPr lang="en-US" smtClean="0"/>
+              <a:rPr lang="en-US"/>
               <a:t>Fourth level</a:t>
             </a:r>
           </a:p>
           <a:p>
             <a:pPr lvl="4"/>
             <a:r>
-              <a:rPr lang="en-US" smtClean="0"/>
+              <a:rPr lang="en-US"/>
               <a:t>Fifth level</a:t>
             </a:r>
-            <a:endParaRPr lang="en-US"/>
           </a:p>
         </p:txBody>
       </p:sp>
@@ -1660,7 +1662,7 @@
           <a:p>
             <a:pPr lvl="0"/>
             <a:r>
-              <a:rPr lang="en-US" smtClean="0"/>
+              <a:rPr lang="en-US"/>
               <a:t>Click to edit Master text styles</a:t>
             </a:r>
           </a:p>
@@ -1716,38 +1718,37 @@
           <a:p>
             <a:pPr lvl="0"/>
             <a:r>
-              <a:rPr lang="en-US" smtClean="0"/>
+              <a:rPr lang="en-US"/>
               <a:t>Click to edit Master text styles</a:t>
             </a:r>
           </a:p>
           <a:p>
             <a:pPr lvl="1"/>
             <a:r>
-              <a:rPr lang="en-US" smtClean="0"/>
+              <a:rPr lang="en-US"/>
               <a:t>Second level</a:t>
             </a:r>
           </a:p>
           <a:p>
             <a:pPr lvl="2"/>
             <a:r>
-              <a:rPr lang="en-US" smtClean="0"/>
+              <a:rPr lang="en-US"/>
               <a:t>Third level</a:t>
             </a:r>
           </a:p>
           <a:p>
             <a:pPr lvl="3"/>
             <a:r>
-              <a:rPr lang="en-US" smtClean="0"/>
+              <a:rPr lang="en-US"/>
               <a:t>Fourth level</a:t>
             </a:r>
           </a:p>
           <a:p>
             <a:pPr lvl="4"/>
             <a:r>
-              <a:rPr lang="en-US" smtClean="0"/>
+              <a:rPr lang="en-US"/>
               <a:t>Fifth level</a:t>
             </a:r>
-            <a:endParaRPr lang="en-US"/>
           </a:p>
         </p:txBody>
       </p:sp>
@@ -1768,7 +1769,7 @@
           <a:p>
             <a:fld id="{5BCAD085-E8A6-8845-BD4E-CB4CCA059FC4}" type="datetimeFigureOut">
               <a:rPr lang="en-US" smtClean="0"/>
-              <a:t>1/27/13</a:t>
+              <a:t>7/28/2026</a:t>
             </a:fld>
             <a:endParaRPr lang="en-US"/>
           </a:p>
@@ -1862,10 +1863,9 @@
           <a:lstStyle/>
           <a:p>
             <a:r>
-              <a:rPr lang="en-US" smtClean="0"/>
+              <a:rPr lang="en-US"/>
               <a:t>Click to edit Master title style</a:t>
             </a:r>
-            <a:endParaRPr lang="en-US"/>
           </a:p>
         </p:txBody>
       </p:sp>
@@ -1886,7 +1886,7 @@
           <a:p>
             <a:fld id="{5BCAD085-E8A6-8845-BD4E-CB4CCA059FC4}" type="datetimeFigureOut">
               <a:rPr lang="en-US" smtClean="0"/>
-              <a:t>1/27/13</a:t>
+              <a:t>7/28/2026</a:t>
             </a:fld>
             <a:endParaRPr lang="en-US"/>
           </a:p>
@@ -1981,7 +1981,7 @@
           <a:p>
             <a:fld id="{5BCAD085-E8A6-8845-BD4E-CB4CCA059FC4}" type="datetimeFigureOut">
               <a:rPr lang="en-US" smtClean="0"/>
-              <a:t>1/27/13</a:t>
+              <a:t>7/28/2026</a:t>
             </a:fld>
             <a:endParaRPr lang="en-US"/>
           </a:p>
@@ -2084,10 +2084,9 @@
           </a:lstStyle>
           <a:p>
             <a:r>
-              <a:rPr lang="en-US" smtClean="0"/>
+              <a:rPr lang="en-US"/>
               <a:t>Click to edit Master title style</a:t>
             </a:r>
-            <a:endParaRPr lang="en-US"/>
           </a:p>
         </p:txBody>
       </p:sp>
@@ -2141,38 +2140,37 @@
           <a:p>
             <a:pPr lvl="0"/>
             <a:r>
-              <a:rPr lang="en-US" smtClean="0"/>
+              <a:rPr lang="en-US"/>
               <a:t>Click to edit Master text styles</a:t>
             </a:r>
           </a:p>
           <a:p>
             <a:pPr lvl="1"/>
             <a:r>
-              <a:rPr lang="en-US" smtClean="0"/>
+              <a:rPr lang="en-US"/>
               <a:t>Second level</a:t>
             </a:r>
           </a:p>
           <a:p>
             <a:pPr lvl="2"/>
             <a:r>
-              <a:rPr lang="en-US" smtClean="0"/>
+              <a:rPr lang="en-US"/>
               <a:t>Third level</a:t>
             </a:r>
           </a:p>
           <a:p>
             <a:pPr lvl="3"/>
             <a:r>
-              <a:rPr lang="en-US" smtClean="0"/>
+              <a:rPr lang="en-US"/>
               <a:t>Fourth level</a:t>
             </a:r>
           </a:p>
           <a:p>
             <a:pPr lvl="4"/>
             <a:r>
-              <a:rPr lang="en-US" smtClean="0"/>
+              <a:rPr lang="en-US"/>
               <a:t>Fifth level</a:t>
             </a:r>
-            <a:endParaRPr lang="en-US"/>
           </a:p>
         </p:txBody>
       </p:sp>
@@ -2235,7 +2233,7 @@
           <a:p>
             <a:pPr lvl="0"/>
             <a:r>
-              <a:rPr lang="en-US" smtClean="0"/>
+              <a:rPr lang="en-US"/>
               <a:t>Click to edit Master text styles</a:t>
             </a:r>
           </a:p>
@@ -2258,7 +2256,7 @@
           <a:p>
             <a:fld id="{5BCAD085-E8A6-8845-BD4E-CB4CCA059FC4}" type="datetimeFigureOut">
               <a:rPr lang="en-US" smtClean="0"/>
-              <a:t>1/27/13</a:t>
+              <a:t>7/28/2026</a:t>
             </a:fld>
             <a:endParaRPr lang="en-US"/>
           </a:p>
@@ -2361,10 +2359,9 @@
           </a:lstStyle>
           <a:p>
             <a:r>
-              <a:rPr lang="en-US" smtClean="0"/>
+              <a:rPr lang="en-US"/>
               <a:t>Click to edit Master title style</a:t>
             </a:r>
-            <a:endParaRPr lang="en-US"/>
           </a:p>
         </p:txBody>
       </p:sp>
@@ -2488,7 +2485,7 @@
           <a:p>
             <a:pPr lvl="0"/>
             <a:r>
-              <a:rPr lang="en-US" smtClean="0"/>
+              <a:rPr lang="en-US"/>
               <a:t>Click to edit Master text styles</a:t>
             </a:r>
           </a:p>
@@ -2511,7 +2508,7 @@
           <a:p>
             <a:fld id="{5BCAD085-E8A6-8845-BD4E-CB4CCA059FC4}" type="datetimeFigureOut">
               <a:rPr lang="en-US" smtClean="0"/>
-              <a:t>1/27/13</a:t>
+              <a:t>7/28/2026</a:t>
             </a:fld>
             <a:endParaRPr lang="en-US"/>
           </a:p>
@@ -2620,10 +2617,9 @@
           <a:lstStyle/>
           <a:p>
             <a:r>
-              <a:rPr lang="en-US" smtClean="0"/>
+              <a:rPr lang="en-US"/>
               <a:t>Click to edit Master title style</a:t>
             </a:r>
-            <a:endParaRPr lang="en-US"/>
           </a:p>
         </p:txBody>
       </p:sp>
@@ -2654,38 +2650,37 @@
           <a:p>
             <a:pPr lvl="0"/>
             <a:r>
-              <a:rPr lang="en-US" smtClean="0"/>
+              <a:rPr lang="en-US"/>
               <a:t>Click to edit Master text styles</a:t>
             </a:r>
           </a:p>
           <a:p>
             <a:pPr lvl="1"/>
             <a:r>
-              <a:rPr lang="en-US" smtClean="0"/>
+              <a:rPr lang="en-US"/>
               <a:t>Second level</a:t>
             </a:r>
           </a:p>
           <a:p>
             <a:pPr lvl="2"/>
             <a:r>
-              <a:rPr lang="en-US" smtClean="0"/>
+              <a:rPr lang="en-US"/>
               <a:t>Third level</a:t>
             </a:r>
           </a:p>
           <a:p>
             <a:pPr lvl="3"/>
             <a:r>
-              <a:rPr lang="en-US" smtClean="0"/>
+              <a:rPr lang="en-US"/>
               <a:t>Fourth level</a:t>
             </a:r>
           </a:p>
           <a:p>
             <a:pPr lvl="4"/>
             <a:r>
-              <a:rPr lang="en-US" smtClean="0"/>
+              <a:rPr lang="en-US"/>
               <a:t>Fifth level</a:t>
             </a:r>
-            <a:endParaRPr lang="en-US"/>
           </a:p>
         </p:txBody>
       </p:sp>
@@ -2724,7 +2719,7 @@
           <a:p>
             <a:fld id="{5BCAD085-E8A6-8845-BD4E-CB4CCA059FC4}" type="datetimeFigureOut">
               <a:rPr lang="en-US" smtClean="0"/>
-              <a:t>1/27/13</a:t>
+              <a:t>7/28/2026</a:t>
             </a:fld>
             <a:endParaRPr lang="en-US"/>
           </a:p>
@@ -3083,7 +3078,7 @@
 </file>
 
 <file path=ppt/slides/slide1.xml><?xml version="1.0" encoding="utf-8"?>
-<p:sld xmlns:a="http://schemas.openxmlformats.org/drawingml/2006/main" xmlns:p="http://schemas.openxmlformats.org/presentationml/2006/main" xmlns:r="http://schemas.openxmlformats.org/officeDocument/2006/relationships">
+<p:sld xmlns:a="http://schemas.openxmlformats.org/drawingml/2006/main" xmlns:r="http://schemas.openxmlformats.org/officeDocument/2006/relationships" xmlns:p="http://schemas.openxmlformats.org/presentationml/2006/main">
   <p:cSld>
     <p:spTree>
       <p:nvGrpSpPr>
@@ -3091,7 +3086,14 @@
         <p:cNvGrpSpPr/>
         <p:nvPr/>
       </p:nvGrpSpPr>
-      <p:grpSpPr/>
+      <p:grpSpPr>
+        <a:xfrm>
+          <a:off x="0" y="0"/>
+          <a:ext cx="0" cy="0"/>
+          <a:chOff x="0" y="0"/>
+          <a:chExt cx="0" cy="0"/>
+        </a:xfrm>
+      </p:grpSpPr>
       <p:sp>
         <p:nvSpPr>
           <p:cNvPr id="2" name="Rectangle 1"/>
@@ -3100,7 +3102,7 @@
         </p:nvSpPr>
         <p:spPr>
           <a:xfrm>
-            <a:off x="0" y="0"/>
+            <a:off x="5751" y="103512"/>
             <a:ext cx="12191695" cy="6858000"/>
           </a:xfrm>
           <a:prstGeom prst="rect">
@@ -3132,6 +3134,7 @@
           <a:lstStyle/>
           <a:p>
             <a:pPr algn="ctr"/>
+            <a:endParaRPr/>
           </a:p>
         </p:txBody>
       </p:sp>
@@ -3175,6 +3178,7 @@
           <a:lstStyle/>
           <a:p>
             <a:pPr algn="ctr"/>
+            <a:endParaRPr/>
           </a:p>
         </p:txBody>
       </p:sp>
@@ -3187,7 +3191,7 @@
         <p:spPr>
           <a:xfrm>
             <a:off x="731520" y="731520"/>
-            <a:ext cx="6217920" cy="2286000"/>
+            <a:ext cx="6217920" cy="2687915"/>
           </a:xfrm>
           <a:prstGeom prst="rect">
             <a:avLst/>
@@ -3195,7 +3199,7 @@
           <a:noFill/>
         </p:spPr>
         <p:txBody>
-          <a:bodyPr wrap="square" lIns="0" rIns="0" tIns="0">
+          <a:bodyPr wrap="square" lIns="0" tIns="0" rIns="0">
             <a:spAutoFit/>
           </a:bodyPr>
           <a:lstStyle/>
@@ -3209,6 +3213,7 @@
               </a:defRPr>
             </a:pPr>
             <a:r>
+              <a:rPr sz="3200" dirty="0"/>
               <a:t>TASKMATE</a:t>
             </a:r>
           </a:p>
@@ -3225,7 +3230,44 @@
               </a:defRPr>
             </a:pPr>
             <a:r>
-              <a:t>Sistem Manajemen Tugas &amp; Produktivitas Berbasis Web</a:t>
+              <a:rPr sz="3200" dirty="0" err="1"/>
+              <a:t>Sistem</a:t>
+            </a:r>
+            <a:r>
+              <a:rPr sz="3200" dirty="0"/>
+              <a:t> </a:t>
+            </a:r>
+            <a:r>
+              <a:rPr sz="3200" dirty="0" err="1"/>
+              <a:t>Manajemen</a:t>
+            </a:r>
+            <a:r>
+              <a:rPr sz="3200" dirty="0"/>
+              <a:t> </a:t>
+            </a:r>
+            <a:r>
+              <a:rPr sz="3200" dirty="0" err="1"/>
+              <a:t>Tugas</a:t>
+            </a:r>
+            <a:r>
+              <a:rPr sz="3200" dirty="0"/>
+              <a:t> &amp; </a:t>
+            </a:r>
+            <a:r>
+              <a:rPr sz="3200" dirty="0" err="1"/>
+              <a:t>Produktivitas</a:t>
+            </a:r>
+            <a:r>
+              <a:rPr sz="3200" dirty="0"/>
+              <a:t> </a:t>
+            </a:r>
+            <a:r>
+              <a:rPr sz="3200" dirty="0" err="1"/>
+              <a:t>Berbasis</a:t>
+            </a:r>
+            <a:r>
+              <a:rPr sz="3200" dirty="0"/>
+              <a:t> Web</a:t>
             </a:r>
           </a:p>
           <a:p>
@@ -3241,7 +3283,36 @@
               </a:defRPr>
             </a:pPr>
             <a:r>
-              <a:t>Laporan Akhir Presentasi Sidang Proyek 1</a:t>
+              <a:rPr sz="3200" dirty="0" err="1"/>
+              <a:t>Laporan</a:t>
+            </a:r>
+            <a:r>
+              <a:rPr sz="3200" dirty="0"/>
+              <a:t> Akhir </a:t>
+            </a:r>
+            <a:r>
+              <a:rPr sz="3200" dirty="0" err="1"/>
+              <a:t>Presentasi</a:t>
+            </a:r>
+            <a:r>
+              <a:rPr sz="3200" dirty="0"/>
+              <a:t> </a:t>
+            </a:r>
+            <a:r>
+              <a:rPr sz="3200" dirty="0" err="1"/>
+              <a:t>Sidang</a:t>
+            </a:r>
+            <a:r>
+              <a:rPr sz="3200" dirty="0"/>
+              <a:t> </a:t>
+            </a:r>
+            <a:r>
+              <a:rPr sz="3200" dirty="0" err="1"/>
+              <a:t>Proyek</a:t>
+            </a:r>
+            <a:r>
+              <a:rPr sz="3200" dirty="0"/>
+              <a:t> 1</a:t>
             </a:r>
           </a:p>
         </p:txBody>
@@ -3310,6 +3381,7 @@
           <a:lstStyle/>
           <a:p>
             <a:pPr algn="ctr"/>
+            <a:endParaRPr/>
           </a:p>
         </p:txBody>
       </p:sp>
@@ -3355,6 +3427,7 @@
           <a:lstStyle/>
           <a:p>
             <a:pPr algn="ctr"/>
+            <a:endParaRPr/>
           </a:p>
         </p:txBody>
       </p:sp>
@@ -3367,7 +3440,7 @@
         <p:spPr>
           <a:xfrm>
             <a:off x="914400" y="3794760"/>
-            <a:ext cx="4754880" cy="2194560"/>
+            <a:ext cx="4754880" cy="1718419"/>
           </a:xfrm>
           <a:prstGeom prst="rect">
             <a:avLst/>
@@ -3375,7 +3448,7 @@
           <a:noFill/>
         </p:spPr>
         <p:txBody>
-          <a:bodyPr wrap="square" lIns="0" rIns="0" tIns="0">
+          <a:bodyPr wrap="square" lIns="0" tIns="0" rIns="0">
             <a:spAutoFit/>
           </a:bodyPr>
           <a:lstStyle/>
@@ -3388,6 +3461,7 @@
               </a:defRPr>
             </a:pPr>
             <a:r>
+              <a:rPr sz="1400" dirty="0"/>
               <a:t>DISUSUN OLEH (KELOMPOK 22):</a:t>
             </a:r>
           </a:p>
@@ -3403,6 +3477,7 @@
               </a:defRPr>
             </a:pPr>
             <a:r>
+              <a:rPr sz="1400" dirty="0"/>
               <a:t>1. Muhammad Ilham Habiballah (NPM: 714250003)</a:t>
             </a:r>
           </a:p>
@@ -3418,8 +3493,39 @@
               </a:defRPr>
             </a:pPr>
             <a:r>
-              <a:t>2. Gianjar Nugraha (NPM: 714250007)</a:t>
-            </a:r>
+              <a:rPr sz="1400" dirty="0"/>
+              <a:t>2. </a:t>
+            </a:r>
+            <a:r>
+              <a:rPr sz="1400" dirty="0" err="1"/>
+              <a:t>Gianjar</a:t>
+            </a:r>
+            <a:r>
+              <a:rPr sz="1400" dirty="0"/>
+              <a:t> </a:t>
+            </a:r>
+            <a:r>
+              <a:rPr sz="1400" dirty="0" err="1"/>
+              <a:t>Nugraha</a:t>
+            </a:r>
+            <a:r>
+              <a:rPr sz="1400" dirty="0"/>
+              <a:t> (NPM: 714250007)</a:t>
+            </a:r>
+            <a:endParaRPr lang="en-US" sz="1400" dirty="0"/>
+          </a:p>
+          <a:p>
+            <a:pPr>
+              <a:spcBef>
+                <a:spcPts val="600"/>
+              </a:spcBef>
+              <a:defRPr sz="1300" b="1">
+                <a:solidFill>
+                  <a:srgbClr val="FFFFFF"/>
+                </a:solidFill>
+              </a:defRPr>
+            </a:pPr>
+            <a:endParaRPr sz="1400" dirty="0"/>
           </a:p>
           <a:p>
             <a:pPr>
@@ -3433,11 +3539,27 @@
               </a:defRPr>
             </a:pPr>
             <a:r>
-              <a:t>Program Studi D4 Teknik Informatika</a:t>
-            </a:r>
-            <a:br/>
-            <a:r>
-              <a:t>Universitas Logistik &amp; Bisnis Internasional</a:t>
+              <a:rPr sz="1300" dirty="0"/>
+              <a:t>Program Studi D4 Teknik </a:t>
+            </a:r>
+            <a:r>
+              <a:rPr sz="1300" dirty="0" err="1"/>
+              <a:t>Informatika</a:t>
+            </a:r>
+            <a:br>
+              <a:rPr sz="1300" dirty="0"/>
+            </a:br>
+            <a:r>
+              <a:rPr sz="1300" dirty="0"/>
+              <a:t>Universitas Logistik &amp; </a:t>
+            </a:r>
+            <a:r>
+              <a:rPr sz="1300" dirty="0" err="1"/>
+              <a:t>Bisnis</a:t>
+            </a:r>
+            <a:r>
+              <a:rPr sz="1300" dirty="0"/>
+              <a:t> Internasional</a:t>
             </a:r>
           </a:p>
         </p:txBody>
@@ -3484,6 +3606,7 @@
           <a:lstStyle/>
           <a:p>
             <a:pPr algn="ctr"/>
+            <a:endParaRPr/>
           </a:p>
         </p:txBody>
       </p:sp>
@@ -3496,7 +3619,7 @@
         <p:spPr>
           <a:xfrm>
             <a:off x="6400800" y="3794760"/>
-            <a:ext cx="4846320" cy="2194560"/>
+            <a:ext cx="4846320" cy="1620957"/>
           </a:xfrm>
           <a:prstGeom prst="rect">
             <a:avLst/>
@@ -3504,7 +3627,7 @@
           <a:noFill/>
         </p:spPr>
         <p:txBody>
-          <a:bodyPr wrap="square" lIns="0" rIns="0" tIns="0">
+          <a:bodyPr wrap="square" lIns="0" tIns="0" rIns="0">
             <a:spAutoFit/>
           </a:bodyPr>
           <a:lstStyle/>
@@ -3517,6 +3640,7 @@
               </a:defRPr>
             </a:pPr>
             <a:r>
+              <a:rPr sz="1400" dirty="0"/>
               <a:t>DOSEN PEMBIMBING &amp; INSTITUSI:</a:t>
             </a:r>
           </a:p>
@@ -3532,7 +3656,20 @@
               </a:defRPr>
             </a:pPr>
             <a:r>
-              <a:t>Pembimbing: Cahyo Prianto, S.Pd., M.T., CDSP, SFPC</a:t>
+              <a:rPr sz="1400" dirty="0" err="1"/>
+              <a:t>Pembimbing</a:t>
+            </a:r>
+            <a:r>
+              <a:rPr sz="1400" dirty="0"/>
+              <a:t>: Cahyo Prianto, </a:t>
+            </a:r>
+            <a:r>
+              <a:rPr sz="1400" dirty="0" err="1"/>
+              <a:t>S.Pd</a:t>
+            </a:r>
+            <a:r>
+              <a:rPr sz="1400" dirty="0"/>
+              <a:t>., M.T., CDSP, SFPC</a:t>
             </a:r>
           </a:p>
           <a:p>
@@ -3547,8 +3684,27 @@
               </a:defRPr>
             </a:pPr>
             <a:r>
-              <a:t>Tahun Akademik: 2025/2026</a:t>
-            </a:r>
+              <a:rPr sz="1400" dirty="0" err="1"/>
+              <a:t>Tahun</a:t>
+            </a:r>
+            <a:r>
+              <a:rPr sz="1400" dirty="0"/>
+              <a:t> Akademik: 2025/2026</a:t>
+            </a:r>
+            <a:endParaRPr lang="en-US" sz="1400" dirty="0"/>
+          </a:p>
+          <a:p>
+            <a:pPr>
+              <a:spcBef>
+                <a:spcPts val="600"/>
+              </a:spcBef>
+              <a:defRPr sz="1250">
+                <a:solidFill>
+                  <a:srgbClr val="FFFFFF"/>
+                </a:solidFill>
+              </a:defRPr>
+            </a:pPr>
+            <a:endParaRPr sz="1400" dirty="0"/>
           </a:p>
           <a:p>
             <a:pPr>
@@ -3562,7 +3718,16 @@
               </a:defRPr>
             </a:pPr>
             <a:r>
-              <a:t>D4 Teknik Informatika ULBI 2026  |  TASKMATE.ULBI.AC.ID</a:t>
+              <a:rPr sz="1300" dirty="0"/>
+              <a:t>D4 Teknik </a:t>
+            </a:r>
+            <a:r>
+              <a:rPr sz="1300" dirty="0" err="1"/>
+              <a:t>Informatika</a:t>
+            </a:r>
+            <a:r>
+              <a:rPr sz="1300" dirty="0"/>
+              <a:t> ULBI 2026  |  TASKMATE.ULBI.AC.ID</a:t>
             </a:r>
           </a:p>
         </p:txBody>
@@ -3576,7 +3741,7 @@
 </file>
 
 <file path=ppt/slides/slide2.xml><?xml version="1.0" encoding="utf-8"?>
-<p:sld xmlns:a="http://schemas.openxmlformats.org/drawingml/2006/main" xmlns:p="http://schemas.openxmlformats.org/presentationml/2006/main" xmlns:r="http://schemas.openxmlformats.org/officeDocument/2006/relationships">
+<p:sld xmlns:a="http://schemas.openxmlformats.org/drawingml/2006/main" xmlns:r="http://schemas.openxmlformats.org/officeDocument/2006/relationships" xmlns:p="http://schemas.openxmlformats.org/presentationml/2006/main">
   <p:cSld>
     <p:spTree>
       <p:nvGrpSpPr>
@@ -3584,7 +3749,14 @@
         <p:cNvGrpSpPr/>
         <p:nvPr/>
       </p:nvGrpSpPr>
-      <p:grpSpPr/>
+      <p:grpSpPr>
+        <a:xfrm>
+          <a:off x="0" y="0"/>
+          <a:ext cx="0" cy="0"/>
+          <a:chOff x="0" y="0"/>
+          <a:chExt cx="0" cy="0"/>
+        </a:xfrm>
+      </p:grpSpPr>
       <p:sp>
         <p:nvSpPr>
           <p:cNvPr id="2" name="Rectangle 1"/>
@@ -3625,6 +3797,7 @@
           <a:lstStyle/>
           <a:p>
             <a:pPr algn="ctr"/>
+            <a:endParaRPr/>
           </a:p>
         </p:txBody>
       </p:sp>
@@ -3668,6 +3841,7 @@
           <a:lstStyle/>
           <a:p>
             <a:pPr algn="ctr"/>
+            <a:endParaRPr/>
           </a:p>
         </p:txBody>
       </p:sp>
@@ -3688,7 +3862,7 @@
           <a:noFill/>
         </p:spPr>
         <p:txBody>
-          <a:bodyPr wrap="square" lIns="0" rIns="0" tIns="0" bIns="0">
+          <a:bodyPr wrap="square" lIns="0" tIns="0" rIns="0" bIns="0">
             <a:spAutoFit/>
           </a:bodyPr>
           <a:lstStyle/>
@@ -3724,7 +3898,7 @@
           <a:noFill/>
         </p:spPr>
         <p:txBody>
-          <a:bodyPr wrap="square" lIns="0" rIns="0" tIns="0" bIns="0">
+          <a:bodyPr wrap="square" lIns="0" tIns="0" rIns="0" bIns="0">
             <a:spAutoFit/>
           </a:bodyPr>
           <a:lstStyle/>
@@ -3760,7 +3934,7 @@
           <a:noFill/>
         </p:spPr>
         <p:txBody>
-          <a:bodyPr wrap="none" lIns="0" rIns="0" tIns="0" bIns="0">
+          <a:bodyPr wrap="none" lIns="0" tIns="0" rIns="0" bIns="0">
             <a:spAutoFit/>
           </a:bodyPr>
           <a:lstStyle/>
@@ -3819,6 +3993,7 @@
           <a:lstStyle/>
           <a:p>
             <a:pPr algn="ctr"/>
+            <a:endParaRPr/>
           </a:p>
         </p:txBody>
       </p:sp>
@@ -3830,7 +4005,7 @@
         </p:nvSpPr>
         <p:spPr>
           <a:xfrm>
-            <a:off x="731520" y="1188720"/>
+            <a:off x="731520" y="1144725"/>
             <a:ext cx="5212080" cy="4754880"/>
           </a:xfrm>
           <a:prstGeom prst="roundRect">
@@ -3864,6 +4039,7 @@
           <a:lstStyle/>
           <a:p>
             <a:pPr algn="ctr"/>
+            <a:endParaRPr/>
           </a:p>
         </p:txBody>
       </p:sp>
@@ -3903,7 +4079,7 @@
           </a:fontRef>
         </p:style>
         <p:txBody>
-          <a:bodyPr rtlCol="0" anchor="ctr" wrap="none" lIns="0" rIns="0" tIns="0" bIns="0"/>
+          <a:bodyPr wrap="none" lIns="0" tIns="0" rIns="0" bIns="0" rtlCol="0" anchor="ctr"/>
           <a:lstStyle/>
           <a:p>
             <a:pPr algn="ctr">
@@ -3937,7 +4113,7 @@
           <a:noFill/>
         </p:spPr>
         <p:txBody>
-          <a:bodyPr wrap="none" lIns="0" rIns="0" tIns="0">
+          <a:bodyPr wrap="none" lIns="0" tIns="0" rIns="0">
             <a:spAutoFit/>
           </a:bodyPr>
           <a:lstStyle/>
@@ -3964,7 +4140,7 @@
         <p:spPr>
           <a:xfrm>
             <a:off x="1005840" y="1920240"/>
-            <a:ext cx="4663440" cy="2103120"/>
+            <a:ext cx="4663440" cy="1903085"/>
           </a:xfrm>
           <a:prstGeom prst="rect">
             <a:avLst/>
@@ -3972,7 +4148,7 @@
           <a:noFill/>
         </p:spPr>
         <p:txBody>
-          <a:bodyPr wrap="square" lIns="0" rIns="0" tIns="0">
+          <a:bodyPr wrap="square" lIns="0" tIns="0" rIns="0">
             <a:spAutoFit/>
           </a:bodyPr>
           <a:lstStyle/>
@@ -3988,12 +4164,76 @@
               </a:defRPr>
             </a:pPr>
             <a:r>
-              <a:rPr b="1">
+              <a:rPr sz="1300" b="1" dirty="0">
                 <a:solidFill>
                   <a:srgbClr val="E91E63"/>
                 </a:solidFill>
               </a:rPr>
-              <a:t>1   Beban aktivitas akademik mahasiswa D4 TI ULBI yang sangat padat.</a:t>
+              <a:t>1   Beban </a:t>
+            </a:r>
+            <a:r>
+              <a:rPr sz="1300" b="1" dirty="0" err="1">
+                <a:solidFill>
+                  <a:srgbClr val="E91E63"/>
+                </a:solidFill>
+              </a:rPr>
+              <a:t>aktivitas</a:t>
+            </a:r>
+            <a:r>
+              <a:rPr sz="1300" b="1" dirty="0">
+                <a:solidFill>
+                  <a:srgbClr val="E91E63"/>
+                </a:solidFill>
+              </a:rPr>
+              <a:t> </a:t>
+            </a:r>
+            <a:r>
+              <a:rPr sz="1300" b="1" dirty="0" err="1">
+                <a:solidFill>
+                  <a:srgbClr val="E91E63"/>
+                </a:solidFill>
+              </a:rPr>
+              <a:t>akademik</a:t>
+            </a:r>
+            <a:r>
+              <a:rPr sz="1300" b="1" dirty="0">
+                <a:solidFill>
+                  <a:srgbClr val="E91E63"/>
+                </a:solidFill>
+              </a:rPr>
+              <a:t> </a:t>
+            </a:r>
+            <a:r>
+              <a:rPr sz="1300" b="1" dirty="0" err="1">
+                <a:solidFill>
+                  <a:srgbClr val="E91E63"/>
+                </a:solidFill>
+              </a:rPr>
+              <a:t>mahasiswa</a:t>
+            </a:r>
+            <a:r>
+              <a:rPr sz="1300" b="1" dirty="0">
+                <a:solidFill>
+                  <a:srgbClr val="E91E63"/>
+                </a:solidFill>
+              </a:rPr>
+              <a:t> D4 TI ULBI yang sangat </a:t>
+            </a:r>
+            <a:r>
+              <a:rPr sz="1300" b="1" dirty="0" err="1">
+                <a:solidFill>
+                  <a:srgbClr val="E91E63"/>
+                </a:solidFill>
+              </a:rPr>
+              <a:t>padat</a:t>
+            </a:r>
+            <a:r>
+              <a:rPr sz="1300" b="1" dirty="0">
+                <a:solidFill>
+                  <a:srgbClr val="E91E63"/>
+                </a:solidFill>
+              </a:rPr>
+              <a:t>.</a:t>
             </a:r>
           </a:p>
           <a:p>
@@ -4008,12 +4248,124 @@
               </a:defRPr>
             </a:pPr>
             <a:r>
-              <a:rPr b="1">
+              <a:rPr sz="1300" b="1" dirty="0">
                 <a:solidFill>
                   <a:srgbClr val="E91E63"/>
                 </a:solidFill>
               </a:rPr>
-              <a:t>2   Pencatatan tugas harian/praktikum konvensional bersifat pasif.</a:t>
+              <a:t>2   </a:t>
+            </a:r>
+            <a:r>
+              <a:rPr sz="1300" b="1" dirty="0" err="1">
+                <a:solidFill>
+                  <a:srgbClr val="E91E63"/>
+                </a:solidFill>
+              </a:rPr>
+              <a:t>Pencatatan</a:t>
+            </a:r>
+            <a:r>
+              <a:rPr sz="1300" b="1" dirty="0">
+                <a:solidFill>
+                  <a:srgbClr val="E91E63"/>
+                </a:solidFill>
+              </a:rPr>
+              <a:t> </a:t>
+            </a:r>
+            <a:r>
+              <a:rPr sz="1300" b="1" dirty="0" err="1">
+                <a:solidFill>
+                  <a:srgbClr val="E91E63"/>
+                </a:solidFill>
+              </a:rPr>
+              <a:t>tugas</a:t>
+            </a:r>
+            <a:r>
+              <a:rPr sz="1300" b="1" dirty="0">
+                <a:solidFill>
+                  <a:srgbClr val="E91E63"/>
+                </a:solidFill>
+              </a:rPr>
+              <a:t> </a:t>
+            </a:r>
+            <a:r>
+              <a:rPr sz="1300" b="1" dirty="0" err="1">
+                <a:solidFill>
+                  <a:srgbClr val="E91E63"/>
+                </a:solidFill>
+              </a:rPr>
+              <a:t>harian</a:t>
+            </a:r>
+            <a:r>
+              <a:rPr sz="1300" b="1" dirty="0">
+                <a:solidFill>
+                  <a:srgbClr val="E91E63"/>
+                </a:solidFill>
+              </a:rPr>
+              <a:t>/</a:t>
+            </a:r>
+            <a:r>
+              <a:rPr sz="1300" b="1" dirty="0" err="1">
+                <a:solidFill>
+                  <a:srgbClr val="E91E63"/>
+                </a:solidFill>
+              </a:rPr>
+              <a:t>praktikum</a:t>
+            </a:r>
+            <a:r>
+              <a:rPr sz="1300" b="1" dirty="0">
+                <a:solidFill>
+                  <a:srgbClr val="E91E63"/>
+                </a:solidFill>
+              </a:rPr>
+              <a:t> </a:t>
+            </a:r>
+            <a:r>
+              <a:rPr sz="1300" b="1" dirty="0" err="1">
+                <a:solidFill>
+                  <a:srgbClr val="E91E63"/>
+                </a:solidFill>
+              </a:rPr>
+              <a:t>konvensional</a:t>
+            </a:r>
+            <a:r>
+              <a:rPr sz="1300" b="1" dirty="0">
+                <a:solidFill>
+                  <a:srgbClr val="E91E63"/>
+                </a:solidFill>
+              </a:rPr>
+              <a:t> </a:t>
+            </a:r>
+            <a:r>
+              <a:rPr sz="1300" b="1" dirty="0" err="1">
+                <a:solidFill>
+                  <a:srgbClr val="E91E63"/>
+                </a:solidFill>
+              </a:rPr>
+              <a:t>bersifat</a:t>
+            </a:r>
+            <a:r>
+              <a:rPr sz="1300" b="1" dirty="0">
+                <a:solidFill>
+                  <a:srgbClr val="E91E63"/>
+                </a:solidFill>
+              </a:rPr>
+              <a:t> </a:t>
+            </a:r>
+            <a:r>
+              <a:rPr sz="1300" b="1" dirty="0" err="1">
+                <a:solidFill>
+                  <a:srgbClr val="E91E63"/>
+                </a:solidFill>
+              </a:rPr>
+              <a:t>pasif</a:t>
+            </a:r>
+            <a:r>
+              <a:rPr sz="1300" b="1" dirty="0">
+                <a:solidFill>
+                  <a:srgbClr val="E91E63"/>
+                </a:solidFill>
+              </a:rPr>
+              <a:t>.</a:t>
             </a:r>
           </a:p>
           <a:p>
@@ -4028,12 +4380,76 @@
               </a:defRPr>
             </a:pPr>
             <a:r>
-              <a:rPr b="1">
+              <a:rPr sz="1300" b="1" dirty="0">
                 <a:solidFill>
                   <a:srgbClr val="E91E63"/>
                 </a:solidFill>
               </a:rPr>
-              <a:t>3   Ketiadaan pengingat proaktif yang terintegrasi (forgetfulness).</a:t>
+              <a:t>3   </a:t>
+            </a:r>
+            <a:r>
+              <a:rPr sz="1300" b="1" dirty="0" err="1">
+                <a:solidFill>
+                  <a:srgbClr val="E91E63"/>
+                </a:solidFill>
+              </a:rPr>
+              <a:t>Ketiadaan</a:t>
+            </a:r>
+            <a:r>
+              <a:rPr sz="1300" b="1" dirty="0">
+                <a:solidFill>
+                  <a:srgbClr val="E91E63"/>
+                </a:solidFill>
+              </a:rPr>
+              <a:t> </a:t>
+            </a:r>
+            <a:r>
+              <a:rPr sz="1300" b="1" dirty="0" err="1">
+                <a:solidFill>
+                  <a:srgbClr val="E91E63"/>
+                </a:solidFill>
+              </a:rPr>
+              <a:t>pengingat</a:t>
+            </a:r>
+            <a:r>
+              <a:rPr sz="1300" b="1" dirty="0">
+                <a:solidFill>
+                  <a:srgbClr val="E91E63"/>
+                </a:solidFill>
+              </a:rPr>
+              <a:t> </a:t>
+            </a:r>
+            <a:r>
+              <a:rPr sz="1300" b="1" dirty="0" err="1">
+                <a:solidFill>
+                  <a:srgbClr val="E91E63"/>
+                </a:solidFill>
+              </a:rPr>
+              <a:t>proaktif</a:t>
+            </a:r>
+            <a:r>
+              <a:rPr sz="1300" b="1" dirty="0">
+                <a:solidFill>
+                  <a:srgbClr val="E91E63"/>
+                </a:solidFill>
+              </a:rPr>
+              <a:t> yang </a:t>
+            </a:r>
+            <a:r>
+              <a:rPr sz="1300" b="1" dirty="0" err="1">
+                <a:solidFill>
+                  <a:srgbClr val="E91E63"/>
+                </a:solidFill>
+              </a:rPr>
+              <a:t>terintegrasi</a:t>
+            </a:r>
+            <a:r>
+              <a:rPr sz="1300" b="1" dirty="0">
+                <a:solidFill>
+                  <a:srgbClr val="E91E63"/>
+                </a:solidFill>
+              </a:rPr>
+              <a:t> (forgetfulness).</a:t>
             </a:r>
           </a:p>
           <a:p>
@@ -4048,12 +4464,140 @@
               </a:defRPr>
             </a:pPr>
             <a:r>
-              <a:rPr b="1">
+              <a:rPr sz="1300" b="1" dirty="0">
                 <a:solidFill>
                   <a:srgbClr val="E91E63"/>
                 </a:solidFill>
               </a:rPr>
-              <a:t>4   Kesulitan menyusun skala prioritas pengerjaan tugas secara dinamis.</a:t>
+              <a:t>4   </a:t>
+            </a:r>
+            <a:r>
+              <a:rPr sz="1300" b="1" dirty="0" err="1">
+                <a:solidFill>
+                  <a:srgbClr val="E91E63"/>
+                </a:solidFill>
+              </a:rPr>
+              <a:t>Kesulitan</a:t>
+            </a:r>
+            <a:r>
+              <a:rPr sz="1300" b="1" dirty="0">
+                <a:solidFill>
+                  <a:srgbClr val="E91E63"/>
+                </a:solidFill>
+              </a:rPr>
+              <a:t> </a:t>
+            </a:r>
+            <a:r>
+              <a:rPr sz="1300" b="1" dirty="0" err="1">
+                <a:solidFill>
+                  <a:srgbClr val="E91E63"/>
+                </a:solidFill>
+              </a:rPr>
+              <a:t>menyusun</a:t>
+            </a:r>
+            <a:r>
+              <a:rPr sz="1300" b="1" dirty="0">
+                <a:solidFill>
+                  <a:srgbClr val="E91E63"/>
+                </a:solidFill>
+              </a:rPr>
+              <a:t> </a:t>
+            </a:r>
+            <a:r>
+              <a:rPr sz="1300" b="1" dirty="0" err="1">
+                <a:solidFill>
+                  <a:srgbClr val="E91E63"/>
+                </a:solidFill>
+              </a:rPr>
+              <a:t>skala</a:t>
+            </a:r>
+            <a:r>
+              <a:rPr sz="1300" b="1" dirty="0">
+                <a:solidFill>
+                  <a:srgbClr val="E91E63"/>
+                </a:solidFill>
+              </a:rPr>
+              <a:t> </a:t>
+            </a:r>
+            <a:r>
+              <a:rPr sz="1300" b="1" dirty="0" err="1">
+                <a:solidFill>
+                  <a:srgbClr val="E91E63"/>
+                </a:solidFill>
+              </a:rPr>
+              <a:t>prioritas</a:t>
+            </a:r>
+            <a:r>
+              <a:rPr sz="1300" b="1" dirty="0">
+                <a:solidFill>
+                  <a:srgbClr val="E91E63"/>
+                </a:solidFill>
+              </a:rPr>
+              <a:t> </a:t>
+            </a:r>
+            <a:r>
+              <a:rPr sz="1300" b="1" dirty="0" err="1">
+                <a:solidFill>
+                  <a:srgbClr val="E91E63"/>
+                </a:solidFill>
+              </a:rPr>
+              <a:t>pengerjaan</a:t>
+            </a:r>
+            <a:r>
+              <a:rPr sz="1300" b="1" dirty="0">
+                <a:solidFill>
+                  <a:srgbClr val="E91E63"/>
+                </a:solidFill>
+              </a:rPr>
+              <a:t> </a:t>
+            </a:r>
+            <a:r>
+              <a:rPr sz="1300" b="1" dirty="0" err="1">
+                <a:solidFill>
+                  <a:srgbClr val="E91E63"/>
+                </a:solidFill>
+              </a:rPr>
+              <a:t>tugas</a:t>
+            </a:r>
+            <a:r>
+              <a:rPr sz="1300" b="1" dirty="0">
+                <a:solidFill>
+                  <a:srgbClr val="E91E63"/>
+                </a:solidFill>
+              </a:rPr>
+              <a:t> </a:t>
+            </a:r>
+            <a:r>
+              <a:rPr sz="1300" b="1" dirty="0" err="1">
+                <a:solidFill>
+                  <a:srgbClr val="E91E63"/>
+                </a:solidFill>
+              </a:rPr>
+              <a:t>secara</a:t>
+            </a:r>
+            <a:r>
+              <a:rPr sz="1300" b="1" dirty="0">
+                <a:solidFill>
+                  <a:srgbClr val="E91E63"/>
+                </a:solidFill>
+              </a:rPr>
+              <a:t> </a:t>
+            </a:r>
+            <a:r>
+              <a:rPr sz="1300" b="1" dirty="0" err="1">
+                <a:solidFill>
+                  <a:srgbClr val="E91E63"/>
+                </a:solidFill>
+              </a:rPr>
+              <a:t>dinamis</a:t>
+            </a:r>
+            <a:r>
+              <a:rPr sz="1300" b="1" dirty="0">
+                <a:solidFill>
+                  <a:srgbClr val="E91E63"/>
+                </a:solidFill>
+              </a:rPr>
+              <a:t>.</a:t>
             </a:r>
           </a:p>
           <a:p>
@@ -4068,12 +4612,108 @@
               </a:defRPr>
             </a:pPr>
             <a:r>
-              <a:rPr b="1">
+              <a:rPr sz="1300" b="1" dirty="0">
                 <a:solidFill>
                   <a:srgbClr val="E91E63"/>
                 </a:solidFill>
               </a:rPr>
-              <a:t>5   Pengelola (Admin) kesulitan memantau produktivitas tugas mahasiswa.</a:t>
+              <a:t>5   </a:t>
+            </a:r>
+            <a:r>
+              <a:rPr sz="1300" b="1" dirty="0" err="1">
+                <a:solidFill>
+                  <a:srgbClr val="E91E63"/>
+                </a:solidFill>
+              </a:rPr>
+              <a:t>Pengelola</a:t>
+            </a:r>
+            <a:r>
+              <a:rPr sz="1300" b="1" dirty="0">
+                <a:solidFill>
+                  <a:srgbClr val="E91E63"/>
+                </a:solidFill>
+              </a:rPr>
+              <a:t> (Admin) </a:t>
+            </a:r>
+            <a:r>
+              <a:rPr sz="1300" b="1" dirty="0" err="1">
+                <a:solidFill>
+                  <a:srgbClr val="E91E63"/>
+                </a:solidFill>
+              </a:rPr>
+              <a:t>kesulitan</a:t>
+            </a:r>
+            <a:r>
+              <a:rPr sz="1300" b="1" dirty="0">
+                <a:solidFill>
+                  <a:srgbClr val="E91E63"/>
+                </a:solidFill>
+              </a:rPr>
+              <a:t> </a:t>
+            </a:r>
+            <a:r>
+              <a:rPr sz="1300" b="1" dirty="0" err="1">
+                <a:solidFill>
+                  <a:srgbClr val="E91E63"/>
+                </a:solidFill>
+              </a:rPr>
+              <a:t>memantau</a:t>
+            </a:r>
+            <a:r>
+              <a:rPr sz="1300" b="1" dirty="0">
+                <a:solidFill>
+                  <a:srgbClr val="E91E63"/>
+                </a:solidFill>
+              </a:rPr>
+              <a:t> </a:t>
+            </a:r>
+            <a:r>
+              <a:rPr sz="1300" b="1" dirty="0" err="1">
+                <a:solidFill>
+                  <a:srgbClr val="E91E63"/>
+                </a:solidFill>
+              </a:rPr>
+              <a:t>produktivitas</a:t>
+            </a:r>
+            <a:r>
+              <a:rPr sz="1300" b="1" dirty="0">
+                <a:solidFill>
+                  <a:srgbClr val="E91E63"/>
+                </a:solidFill>
+              </a:rPr>
+              <a:t> </a:t>
+            </a:r>
+            <a:r>
+              <a:rPr sz="1300" b="1" dirty="0" err="1">
+                <a:solidFill>
+                  <a:srgbClr val="E91E63"/>
+                </a:solidFill>
+              </a:rPr>
+              <a:t>tugas</a:t>
+            </a:r>
+            <a:r>
+              <a:rPr sz="1300" b="1" dirty="0">
+                <a:solidFill>
+                  <a:srgbClr val="E91E63"/>
+                </a:solidFill>
+              </a:rPr>
+              <a:t> </a:t>
+            </a:r>
+            <a:r>
+              <a:rPr sz="1300" b="1" dirty="0" err="1">
+                <a:solidFill>
+                  <a:srgbClr val="E91E63"/>
+                </a:solidFill>
+              </a:rPr>
+              <a:t>mahasiswa</a:t>
+            </a:r>
+            <a:r>
+              <a:rPr sz="1300" b="1" dirty="0">
+                <a:solidFill>
+                  <a:srgbClr val="E91E63"/>
+                </a:solidFill>
+              </a:rPr>
+              <a:t>.</a:t>
             </a:r>
           </a:p>
         </p:txBody>
@@ -4118,6 +4758,7 @@
           <a:lstStyle/>
           <a:p>
             <a:pPr algn="ctr"/>
+            <a:endParaRPr/>
           </a:p>
         </p:txBody>
       </p:sp>
@@ -4190,6 +4831,7 @@
           <a:lstStyle/>
           <a:p>
             <a:pPr algn="ctr"/>
+            <a:endParaRPr/>
           </a:p>
         </p:txBody>
       </p:sp>
@@ -4233,6 +4875,7 @@
           <a:lstStyle/>
           <a:p>
             <a:pPr algn="ctr"/>
+            <a:endParaRPr/>
           </a:p>
         </p:txBody>
       </p:sp>
@@ -4245,7 +4888,7 @@
         <p:spPr>
           <a:xfrm>
             <a:off x="3383280" y="4389120"/>
-            <a:ext cx="2286000" cy="1097280"/>
+            <a:ext cx="2286000" cy="692497"/>
           </a:xfrm>
           <a:prstGeom prst="rect">
             <a:avLst/>
@@ -4253,7 +4896,7 @@
           <a:noFill/>
         </p:spPr>
         <p:txBody>
-          <a:bodyPr wrap="square" lIns="0" rIns="0" tIns="0">
+          <a:bodyPr wrap="square" lIns="0" tIns="0" rIns="0">
             <a:spAutoFit/>
           </a:bodyPr>
           <a:lstStyle/>
@@ -4266,11 +4909,43 @@
               </a:defRPr>
             </a:pPr>
             <a:r>
-              <a:t>TaskMate UI / UX</a:t>
-            </a:r>
-            <a:br/>
-            <a:r>
-              <a:t>Modern Dashboard dengan visual manajemen responsif.</a:t>
+              <a:rPr sz="1400" dirty="0" err="1"/>
+              <a:t>TaskMate</a:t>
+            </a:r>
+            <a:r>
+              <a:rPr sz="1400" dirty="0"/>
+              <a:t> UI / UX</a:t>
+            </a:r>
+            <a:br>
+              <a:rPr sz="1400" dirty="0"/>
+            </a:br>
+            <a:r>
+              <a:rPr sz="1400" dirty="0"/>
+              <a:t>Modern Dashboard </a:t>
+            </a:r>
+            <a:r>
+              <a:rPr sz="1400" dirty="0" err="1"/>
+              <a:t>dengan</a:t>
+            </a:r>
+            <a:r>
+              <a:rPr sz="1400" dirty="0"/>
+              <a:t> visual </a:t>
+            </a:r>
+            <a:r>
+              <a:rPr sz="1400" dirty="0" err="1"/>
+              <a:t>manajemen</a:t>
+            </a:r>
+            <a:r>
+              <a:rPr sz="1400" dirty="0"/>
+              <a:t> </a:t>
+            </a:r>
+            <a:r>
+              <a:rPr sz="1400" dirty="0" err="1"/>
+              <a:t>responsif</a:t>
+            </a:r>
+            <a:r>
+              <a:rPr sz="1400" dirty="0"/>
+              <a:t>.</a:t>
             </a:r>
           </a:p>
         </p:txBody>
@@ -4317,6 +4992,7 @@
           <a:lstStyle/>
           <a:p>
             <a:pPr algn="ctr"/>
+            <a:endParaRPr/>
           </a:p>
         </p:txBody>
       </p:sp>
@@ -4356,7 +5032,7 @@
           </a:fontRef>
         </p:style>
         <p:txBody>
-          <a:bodyPr rtlCol="0" anchor="ctr" wrap="none" lIns="0" rIns="0" tIns="0" bIns="0"/>
+          <a:bodyPr wrap="none" lIns="0" tIns="0" rIns="0" bIns="0" rtlCol="0" anchor="ctr"/>
           <a:lstStyle/>
           <a:p>
             <a:pPr algn="ctr">
@@ -4390,7 +5066,7 @@
           <a:noFill/>
         </p:spPr>
         <p:txBody>
-          <a:bodyPr wrap="none" lIns="0" rIns="0" tIns="0">
+          <a:bodyPr wrap="none" lIns="0" tIns="0" rIns="0">
             <a:spAutoFit/>
           </a:bodyPr>
           <a:lstStyle/>
@@ -4417,7 +5093,7 @@
         <p:spPr>
           <a:xfrm>
             <a:off x="6492240" y="1920240"/>
-            <a:ext cx="4663440" cy="822960"/>
+            <a:ext cx="4663440" cy="692497"/>
           </a:xfrm>
           <a:prstGeom prst="rect">
             <a:avLst/>
@@ -4425,7 +5101,7 @@
           <a:noFill/>
         </p:spPr>
         <p:txBody>
-          <a:bodyPr wrap="square" lIns="0" rIns="0" tIns="0">
+          <a:bodyPr wrap="square" lIns="0" tIns="0" rIns="0">
             <a:spAutoFit/>
           </a:bodyPr>
           <a:lstStyle/>
@@ -4441,7 +5117,116 @@
               </a:defRPr>
             </a:pPr>
             <a:r>
-              <a:t>Membangun sistem informasi TaskMate berbasis web untuk mengelola dan memonitor tugas akademik mahasiswa secara efisien, proaktif, dan real-time.</a:t>
+              <a:rPr sz="1400" dirty="0" err="1"/>
+              <a:t>Membangun</a:t>
+            </a:r>
+            <a:r>
+              <a:rPr sz="1400" dirty="0"/>
+              <a:t> </a:t>
+            </a:r>
+            <a:r>
+              <a:rPr sz="1400" dirty="0" err="1"/>
+              <a:t>sistem</a:t>
+            </a:r>
+            <a:r>
+              <a:rPr sz="1400" dirty="0"/>
+              <a:t> </a:t>
+            </a:r>
+            <a:r>
+              <a:rPr sz="1400" dirty="0" err="1"/>
+              <a:t>informasi</a:t>
+            </a:r>
+            <a:r>
+              <a:rPr sz="1400" dirty="0"/>
+              <a:t> </a:t>
+            </a:r>
+            <a:r>
+              <a:rPr sz="1400" dirty="0" err="1"/>
+              <a:t>TaskMate</a:t>
+            </a:r>
+            <a:r>
+              <a:rPr sz="1400" dirty="0"/>
+              <a:t> </a:t>
+            </a:r>
+            <a:r>
+              <a:rPr sz="1400" dirty="0" err="1"/>
+              <a:t>berbasis</a:t>
+            </a:r>
+            <a:r>
+              <a:rPr sz="1400" dirty="0"/>
+              <a:t> web </a:t>
+            </a:r>
+            <a:r>
+              <a:rPr sz="1400" dirty="0" err="1"/>
+              <a:t>untuk</a:t>
+            </a:r>
+            <a:r>
+              <a:rPr sz="1400" dirty="0"/>
+              <a:t> </a:t>
+            </a:r>
+            <a:r>
+              <a:rPr sz="1400" dirty="0" err="1"/>
+              <a:t>mengelola</a:t>
+            </a:r>
+            <a:r>
+              <a:rPr sz="1400" dirty="0"/>
+              <a:t> dan </a:t>
+            </a:r>
+            <a:r>
+              <a:rPr sz="1400" dirty="0" err="1"/>
+              <a:t>memonitor</a:t>
+            </a:r>
+            <a:r>
+              <a:rPr sz="1400" dirty="0"/>
+              <a:t> </a:t>
+            </a:r>
+            <a:r>
+              <a:rPr sz="1400" dirty="0" err="1"/>
+              <a:t>tugas</a:t>
+            </a:r>
+            <a:r>
+              <a:rPr sz="1400" dirty="0"/>
+              <a:t> </a:t>
+            </a:r>
+            <a:r>
+              <a:rPr sz="1400" dirty="0" err="1"/>
+              <a:t>akademik</a:t>
+            </a:r>
+            <a:r>
+              <a:rPr sz="1400" dirty="0"/>
+              <a:t> </a:t>
+            </a:r>
+            <a:r>
+              <a:rPr sz="1400" dirty="0" err="1"/>
+              <a:t>mahasiswa</a:t>
+            </a:r>
+            <a:r>
+              <a:rPr sz="1400" dirty="0"/>
+              <a:t> </a:t>
+            </a:r>
+            <a:r>
+              <a:rPr sz="1400" dirty="0" err="1"/>
+              <a:t>secara</a:t>
+            </a:r>
+            <a:r>
+              <a:rPr sz="1400" dirty="0"/>
+              <a:t> </a:t>
+            </a:r>
+            <a:r>
+              <a:rPr sz="1400" dirty="0" err="1"/>
+              <a:t>efisien</a:t>
+            </a:r>
+            <a:r>
+              <a:rPr sz="1400" dirty="0"/>
+              <a:t>, </a:t>
+            </a:r>
+            <a:r>
+              <a:rPr sz="1400" dirty="0" err="1"/>
+              <a:t>proaktif</a:t>
+            </a:r>
+            <a:r>
+              <a:rPr sz="1400" dirty="0"/>
+              <a:t>, dan real-time.</a:t>
             </a:r>
           </a:p>
         </p:txBody>
@@ -4482,7 +5267,7 @@
           </a:fontRef>
         </p:style>
         <p:txBody>
-          <a:bodyPr rtlCol="0" anchor="ctr" wrap="square" lIns="45720" rIns="45720"/>
+          <a:bodyPr wrap="square" lIns="45720" rIns="45720" rtlCol="0" anchor="ctr"/>
           <a:lstStyle/>
           <a:p>
             <a:pPr algn="ctr">
@@ -4493,8 +5278,14 @@
               </a:defRPr>
             </a:pPr>
             <a:r>
-              <a:t>Visual Kanban Board</a:t>
-            </a:r>
+              <a:rPr sz="1200" dirty="0"/>
+              <a:t>Visual </a:t>
+            </a:r>
+            <a:r>
+              <a:rPr lang="en-US" sz="1200" dirty="0"/>
+              <a:t>Kanban Board</a:t>
+            </a:r>
+            <a:endParaRPr sz="1200" dirty="0"/>
           </a:p>
           <a:p>
             <a:pPr algn="ctr">
@@ -4508,8 +5299,26 @@
               </a:defRPr>
             </a:pPr>
             <a:r>
-              <a:t>4 Papan Kolom Tugas</a:t>
-            </a:r>
+              <a:rPr sz="1100" dirty="0">
+                <a:solidFill>
+                  <a:schemeClr val="bg2"/>
+                </a:solidFill>
+              </a:rPr>
+              <a:t>4 Papan Kolom </a:t>
+            </a:r>
+            <a:r>
+              <a:rPr sz="1100" dirty="0" err="1">
+                <a:solidFill>
+                  <a:schemeClr val="bg2"/>
+                </a:solidFill>
+              </a:rPr>
+              <a:t>Tugas</a:t>
+            </a:r>
+            <a:endParaRPr sz="1100" dirty="0">
+              <a:solidFill>
+                <a:schemeClr val="bg2"/>
+              </a:solidFill>
+            </a:endParaRPr>
           </a:p>
         </p:txBody>
       </p:sp>
@@ -4549,7 +5358,7 @@
           </a:fontRef>
         </p:style>
         <p:txBody>
-          <a:bodyPr rtlCol="0" anchor="ctr" wrap="square" lIns="45720" rIns="45720"/>
+          <a:bodyPr wrap="square" lIns="45720" rIns="45720" rtlCol="0" anchor="ctr"/>
           <a:lstStyle/>
           <a:p>
             <a:pPr algn="ctr">
@@ -4560,6 +5369,7 @@
               </a:defRPr>
             </a:pPr>
             <a:r>
+              <a:rPr sz="1200" dirty="0"/>
               <a:t>WhatsApp Gateway</a:t>
             </a:r>
           </a:p>
@@ -4575,7 +5385,20 @@
               </a:defRPr>
             </a:pPr>
             <a:r>
-              <a:t>Fonnte Auto Reminder</a:t>
+              <a:rPr sz="1100" dirty="0" err="1">
+                <a:solidFill>
+                  <a:schemeClr val="bg2"/>
+                </a:solidFill>
+              </a:rPr>
+              <a:t>Fonnte</a:t>
+            </a:r>
+            <a:r>
+              <a:rPr sz="1100" dirty="0">
+                <a:solidFill>
+                  <a:schemeClr val="bg2"/>
+                </a:solidFill>
+              </a:rPr>
+              <a:t> Auto Reminder</a:t>
             </a:r>
           </a:p>
         </p:txBody>
@@ -4616,7 +5439,7 @@
           </a:fontRef>
         </p:style>
         <p:txBody>
-          <a:bodyPr rtlCol="0" anchor="ctr" wrap="square" lIns="45720" rIns="45720"/>
+          <a:bodyPr wrap="square" lIns="45720" rIns="45720" rtlCol="0" anchor="ctr"/>
           <a:lstStyle/>
           <a:p>
             <a:pPr algn="ctr">
@@ -4627,6 +5450,7 @@
               </a:defRPr>
             </a:pPr>
             <a:r>
+              <a:rPr sz="1200" dirty="0"/>
               <a:t>Multi-Role Access</a:t>
             </a:r>
           </a:p>
@@ -4642,7 +5466,28 @@
               </a:defRPr>
             </a:pPr>
             <a:r>
-              <a:t>Admin &amp; Mahasiswa Guard</a:t>
+              <a:rPr sz="1100" dirty="0">
+                <a:solidFill>
+                  <a:schemeClr val="bg2"/>
+                </a:solidFill>
+              </a:rPr>
+              <a:t>Admin &amp; </a:t>
+            </a:r>
+            <a:r>
+              <a:rPr sz="1100" dirty="0" err="1">
+                <a:solidFill>
+                  <a:schemeClr val="bg2"/>
+                </a:solidFill>
+              </a:rPr>
+              <a:t>Mahasiswa</a:t>
+            </a:r>
+            <a:r>
+              <a:rPr sz="1100" dirty="0">
+                <a:solidFill>
+                  <a:schemeClr val="bg2"/>
+                </a:solidFill>
+              </a:rPr>
+              <a:t> Guard</a:t>
             </a:r>
           </a:p>
         </p:txBody>
@@ -4683,7 +5528,7 @@
           </a:fontRef>
         </p:style>
         <p:txBody>
-          <a:bodyPr rtlCol="0" anchor="ctr" wrap="square" lIns="45720" rIns="45720"/>
+          <a:bodyPr wrap="square" lIns="45720" rIns="45720" rtlCol="0" anchor="ctr"/>
           <a:lstStyle/>
           <a:p>
             <a:pPr algn="ctr">
@@ -4694,6 +5539,7 @@
               </a:defRPr>
             </a:pPr>
             <a:r>
+              <a:rPr sz="1200" dirty="0"/>
               <a:t>Live Monitoring</a:t>
             </a:r>
           </a:p>
@@ -4709,7 +5555,20 @@
               </a:defRPr>
             </a:pPr>
             <a:r>
-              <a:t>Statistik &amp; Audit Trail</a:t>
+              <a:rPr sz="1100" dirty="0" err="1">
+                <a:solidFill>
+                  <a:schemeClr val="bg2"/>
+                </a:solidFill>
+              </a:rPr>
+              <a:t>Statistik</a:t>
+            </a:r>
+            <a:r>
+              <a:rPr sz="1100" dirty="0">
+                <a:solidFill>
+                  <a:schemeClr val="bg2"/>
+                </a:solidFill>
+              </a:rPr>
+              <a:t> &amp; Audit Trail</a:t>
             </a:r>
           </a:p>
         </p:txBody>
@@ -4752,7 +5611,7 @@
           </a:fontRef>
         </p:style>
         <p:txBody>
-          <a:bodyPr rtlCol="0" anchor="ctr" wrap="square"/>
+          <a:bodyPr wrap="square" rtlCol="0" anchor="ctr"/>
           <a:lstStyle/>
           <a:p>
             <a:pPr algn="ctr">
@@ -4763,7 +5622,96 @@
               </a:defRPr>
             </a:pPr>
             <a:r>
-              <a:t>🎯 Output Akhir: Produktivitas belajar mahasiswa meningkat, angka keterlambatan tugas dapat diturunkan secara drastis.</a:t>
+              <a:rPr sz="1100" dirty="0"/>
+              <a:t>🎯 Output Akhir: </a:t>
+            </a:r>
+            <a:r>
+              <a:rPr sz="1100" dirty="0" err="1"/>
+              <a:t>Produktivitas</a:t>
+            </a:r>
+            <a:r>
+              <a:rPr sz="1100" dirty="0"/>
+              <a:t> </a:t>
+            </a:r>
+            <a:r>
+              <a:rPr sz="1100" dirty="0" err="1"/>
+              <a:t>belajar</a:t>
+            </a:r>
+            <a:r>
+              <a:rPr sz="1100" dirty="0"/>
+              <a:t> </a:t>
+            </a:r>
+            <a:r>
+              <a:rPr sz="1100" dirty="0" err="1"/>
+              <a:t>mahasiswa</a:t>
+            </a:r>
+            <a:r>
+              <a:rPr sz="1100" dirty="0"/>
+              <a:t> </a:t>
+            </a:r>
+            <a:r>
+              <a:rPr sz="1100" dirty="0" err="1"/>
+              <a:t>meningkat</a:t>
+            </a:r>
+            <a:r>
+              <a:rPr sz="1100" dirty="0"/>
+              <a:t>, </a:t>
+            </a:r>
+            <a:r>
+              <a:rPr sz="1100" dirty="0" err="1"/>
+              <a:t>angka</a:t>
+            </a:r>
+            <a:r>
+              <a:rPr sz="1100" dirty="0"/>
+              <a:t> </a:t>
+            </a:r>
+            <a:r>
+              <a:rPr sz="1100" dirty="0" err="1"/>
+              <a:t>keterlambatan</a:t>
+            </a:r>
+            <a:r>
+              <a:rPr sz="1100" dirty="0"/>
+              <a:t> </a:t>
+            </a:r>
+            <a:r>
+              <a:rPr sz="1100" dirty="0" err="1"/>
+              <a:t>tugas</a:t>
+            </a:r>
+            <a:r>
+              <a:rPr sz="1100" dirty="0"/>
+              <a:t> </a:t>
+            </a:r>
+            <a:r>
+              <a:rPr sz="1100" dirty="0" err="1"/>
+              <a:t>dapat</a:t>
+            </a:r>
+            <a:r>
+              <a:rPr sz="1100" dirty="0"/>
+              <a:t> </a:t>
+            </a:r>
+            <a:r>
+              <a:rPr sz="1100" dirty="0" err="1"/>
+              <a:t>diturunkan</a:t>
+            </a:r>
+            <a:r>
+              <a:rPr sz="1100" dirty="0"/>
+              <a:t> </a:t>
+            </a:r>
+            <a:r>
+              <a:rPr sz="1100" dirty="0" err="1"/>
+              <a:t>secara</a:t>
+            </a:r>
+            <a:r>
+              <a:rPr sz="1100" dirty="0"/>
+              <a:t> </a:t>
+            </a:r>
+            <a:r>
+              <a:rPr sz="1100" dirty="0" err="1"/>
+              <a:t>drastis</a:t>
+            </a:r>
+            <a:r>
+              <a:rPr sz="1100" dirty="0"/>
+              <a:t>.</a:t>
             </a:r>
           </a:p>
         </p:txBody>
@@ -4777,7 +5725,7 @@
 </file>
 
 <file path=ppt/slides/slide3.xml><?xml version="1.0" encoding="utf-8"?>
-<p:sld xmlns:a="http://schemas.openxmlformats.org/drawingml/2006/main" xmlns:p="http://schemas.openxmlformats.org/presentationml/2006/main" xmlns:r="http://schemas.openxmlformats.org/officeDocument/2006/relationships">
+<p:sld xmlns:a="http://schemas.openxmlformats.org/drawingml/2006/main" xmlns:r="http://schemas.openxmlformats.org/officeDocument/2006/relationships" xmlns:p="http://schemas.openxmlformats.org/presentationml/2006/main">
   <p:cSld>
     <p:spTree>
       <p:nvGrpSpPr>
@@ -4785,7 +5733,14 @@
         <p:cNvGrpSpPr/>
         <p:nvPr/>
       </p:nvGrpSpPr>
-      <p:grpSpPr/>
+      <p:grpSpPr>
+        <a:xfrm>
+          <a:off x="0" y="0"/>
+          <a:ext cx="0" cy="0"/>
+          <a:chOff x="0" y="0"/>
+          <a:chExt cx="0" cy="0"/>
+        </a:xfrm>
+      </p:grpSpPr>
       <p:sp>
         <p:nvSpPr>
           <p:cNvPr id="2" name="Rectangle 1"/>
@@ -4826,6 +5781,7 @@
           <a:lstStyle/>
           <a:p>
             <a:pPr algn="ctr"/>
+            <a:endParaRPr/>
           </a:p>
         </p:txBody>
       </p:sp>
@@ -4869,6 +5825,7 @@
           <a:lstStyle/>
           <a:p>
             <a:pPr algn="ctr"/>
+            <a:endParaRPr/>
           </a:p>
         </p:txBody>
       </p:sp>
@@ -4889,7 +5846,7 @@
           <a:noFill/>
         </p:spPr>
         <p:txBody>
-          <a:bodyPr wrap="square" lIns="0" rIns="0" tIns="0" bIns="0">
+          <a:bodyPr wrap="square" lIns="0" tIns="0" rIns="0" bIns="0">
             <a:spAutoFit/>
           </a:bodyPr>
           <a:lstStyle/>
@@ -4925,7 +5882,7 @@
           <a:noFill/>
         </p:spPr>
         <p:txBody>
-          <a:bodyPr wrap="square" lIns="0" rIns="0" tIns="0" bIns="0">
+          <a:bodyPr wrap="square" lIns="0" tIns="0" rIns="0" bIns="0">
             <a:spAutoFit/>
           </a:bodyPr>
           <a:lstStyle/>
@@ -4961,7 +5918,7 @@
           <a:noFill/>
         </p:spPr>
         <p:txBody>
-          <a:bodyPr wrap="none" lIns="0" rIns="0" tIns="0" bIns="0">
+          <a:bodyPr wrap="none" lIns="0" tIns="0" rIns="0" bIns="0">
             <a:spAutoFit/>
           </a:bodyPr>
           <a:lstStyle/>
@@ -5020,6 +5977,7 @@
           <a:lstStyle/>
           <a:p>
             <a:pPr algn="ctr"/>
+            <a:endParaRPr/>
           </a:p>
         </p:txBody>
       </p:sp>
@@ -5065,6 +6023,7 @@
           <a:lstStyle/>
           <a:p>
             <a:pPr algn="ctr"/>
+            <a:endParaRPr/>
           </a:p>
         </p:txBody>
       </p:sp>
@@ -5104,7 +6063,7 @@
           </a:fontRef>
         </p:style>
         <p:txBody>
-          <a:bodyPr rtlCol="0" anchor="ctr" wrap="none" lIns="0" rIns="0" tIns="0" bIns="0"/>
+          <a:bodyPr wrap="none" lIns="0" tIns="0" rIns="0" bIns="0" rtlCol="0" anchor="ctr"/>
           <a:lstStyle/>
           <a:p>
             <a:pPr algn="ctr">
@@ -5130,7 +6089,7 @@
         <p:spPr>
           <a:xfrm>
             <a:off x="2103120" y="1417320"/>
-            <a:ext cx="3566160" cy="1645920"/>
+            <a:ext cx="3566160" cy="1268874"/>
           </a:xfrm>
           <a:prstGeom prst="rect">
             <a:avLst/>
@@ -5138,7 +6097,7 @@
           <a:noFill/>
         </p:spPr>
         <p:txBody>
-          <a:bodyPr wrap="square" lIns="0" rIns="0" tIns="0" bIns="0">
+          <a:bodyPr wrap="square" lIns="0" tIns="0" rIns="0" bIns="0">
             <a:spAutoFit/>
           </a:bodyPr>
           <a:lstStyle/>
@@ -5154,6 +6113,7 @@
               </a:defRPr>
             </a:pPr>
             <a:r>
+              <a:rPr dirty="0"/>
               <a:t>Multi-Role Authorization</a:t>
             </a:r>
           </a:p>
@@ -5169,7 +6129,100 @@
               </a:defRPr>
             </a:pPr>
             <a:r>
-              <a:t>Pemisahan hak akses aman menggunakan Guard Laravel (Mahasiswa untuk workspace tugas terisolasi, Admin untuk dasbor pengawasan &amp; monitoring global).</a:t>
+              <a:rPr sz="1400" dirty="0" err="1"/>
+              <a:t>Pemisahan</a:t>
+            </a:r>
+            <a:r>
+              <a:rPr sz="1400" dirty="0"/>
+              <a:t> </a:t>
+            </a:r>
+            <a:r>
+              <a:rPr sz="1400" dirty="0" err="1"/>
+              <a:t>hak</a:t>
+            </a:r>
+            <a:r>
+              <a:rPr sz="1400" dirty="0"/>
+              <a:t> </a:t>
+            </a:r>
+            <a:r>
+              <a:rPr sz="1400" dirty="0" err="1"/>
+              <a:t>akses</a:t>
+            </a:r>
+            <a:r>
+              <a:rPr sz="1400" dirty="0"/>
+              <a:t> </a:t>
+            </a:r>
+            <a:r>
+              <a:rPr sz="1400" dirty="0" err="1"/>
+              <a:t>aman</a:t>
+            </a:r>
+            <a:r>
+              <a:rPr sz="1400" dirty="0"/>
+              <a:t> </a:t>
+            </a:r>
+            <a:r>
+              <a:rPr sz="1400" dirty="0" err="1"/>
+              <a:t>menggunakan</a:t>
+            </a:r>
+            <a:r>
+              <a:rPr sz="1400" dirty="0"/>
+              <a:t> Guard Laravel (</a:t>
+            </a:r>
+            <a:r>
+              <a:rPr sz="1400" dirty="0" err="1"/>
+              <a:t>Mahasiswa</a:t>
+            </a:r>
+            <a:r>
+              <a:rPr sz="1400" dirty="0"/>
+              <a:t> </a:t>
+            </a:r>
+            <a:r>
+              <a:rPr sz="1400" dirty="0" err="1"/>
+              <a:t>untuk</a:t>
+            </a:r>
+            <a:r>
+              <a:rPr sz="1400" dirty="0"/>
+              <a:t> workspace </a:t>
+            </a:r>
+            <a:r>
+              <a:rPr sz="1400" dirty="0" err="1"/>
+              <a:t>tugas</a:t>
+            </a:r>
+            <a:r>
+              <a:rPr sz="1400" dirty="0"/>
+              <a:t> </a:t>
+            </a:r>
+            <a:r>
+              <a:rPr sz="1400" dirty="0" err="1"/>
+              <a:t>terisolasi</a:t>
+            </a:r>
+            <a:r>
+              <a:rPr sz="1400" dirty="0"/>
+              <a:t>, Admin </a:t>
+            </a:r>
+            <a:r>
+              <a:rPr sz="1400" dirty="0" err="1"/>
+              <a:t>untuk</a:t>
+            </a:r>
+            <a:r>
+              <a:rPr sz="1400" dirty="0"/>
+              <a:t> </a:t>
+            </a:r>
+            <a:r>
+              <a:rPr sz="1400" dirty="0" err="1"/>
+              <a:t>dasbor</a:t>
+            </a:r>
+            <a:r>
+              <a:rPr sz="1400" dirty="0"/>
+              <a:t> </a:t>
+            </a:r>
+            <a:r>
+              <a:rPr sz="1400" dirty="0" err="1"/>
+              <a:t>pengawasan</a:t>
+            </a:r>
+            <a:r>
+              <a:rPr sz="1400" dirty="0"/>
+              <a:t> &amp; monitoring global).</a:t>
             </a:r>
           </a:p>
         </p:txBody>
@@ -5216,6 +6269,7 @@
           <a:lstStyle/>
           <a:p>
             <a:pPr algn="ctr"/>
+            <a:endParaRPr/>
           </a:p>
         </p:txBody>
       </p:sp>
@@ -5255,7 +6309,7 @@
           </a:fontRef>
         </p:style>
         <p:txBody>
-          <a:bodyPr rtlCol="0" anchor="ctr" wrap="none" lIns="0" rIns="0" tIns="0" bIns="0"/>
+          <a:bodyPr wrap="none" lIns="0" tIns="0" rIns="0" bIns="0" rtlCol="0" anchor="ctr"/>
           <a:lstStyle/>
           <a:p>
             <a:pPr algn="ctr">
@@ -5281,7 +6335,7 @@
         <p:spPr>
           <a:xfrm>
             <a:off x="7589520" y="1417320"/>
-            <a:ext cx="3566160" cy="1645920"/>
+            <a:ext cx="3566160" cy="1268874"/>
           </a:xfrm>
           <a:prstGeom prst="rect">
             <a:avLst/>
@@ -5289,7 +6343,7 @@
           <a:noFill/>
         </p:spPr>
         <p:txBody>
-          <a:bodyPr wrap="square" lIns="0" rIns="0" tIns="0" bIns="0">
+          <a:bodyPr wrap="square" lIns="0" tIns="0" rIns="0" bIns="0">
             <a:spAutoFit/>
           </a:bodyPr>
           <a:lstStyle/>
@@ -5305,6 +6359,7 @@
               </a:defRPr>
             </a:pPr>
             <a:r>
+              <a:rPr dirty="0"/>
               <a:t>Visual Kanban Board</a:t>
             </a:r>
           </a:p>
@@ -5320,7 +6375,60 @@
               </a:defRPr>
             </a:pPr>
             <a:r>
-              <a:t>Manajemen tugas dengan 4 kolom visual (To Do, Doing, Review, Done) didukung SortableJS drag-and-drop dan auto-done 100% checklist sub-tugas.</a:t>
+              <a:rPr sz="1400" dirty="0" err="1"/>
+              <a:t>Manajemen</a:t>
+            </a:r>
+            <a:r>
+              <a:rPr sz="1400" dirty="0"/>
+              <a:t> </a:t>
+            </a:r>
+            <a:r>
+              <a:rPr sz="1400" dirty="0" err="1"/>
+              <a:t>tugas</a:t>
+            </a:r>
+            <a:r>
+              <a:rPr sz="1400" dirty="0"/>
+              <a:t> </a:t>
+            </a:r>
+            <a:r>
+              <a:rPr sz="1400" dirty="0" err="1"/>
+              <a:t>dengan</a:t>
+            </a:r>
+            <a:r>
+              <a:rPr sz="1400" dirty="0"/>
+              <a:t> 4 </a:t>
+            </a:r>
+            <a:r>
+              <a:rPr sz="1400" dirty="0" err="1"/>
+              <a:t>kolom</a:t>
+            </a:r>
+            <a:r>
+              <a:rPr sz="1400" dirty="0"/>
+              <a:t> visual (To Do, Doing, Review, Done) </a:t>
+            </a:r>
+            <a:r>
+              <a:rPr sz="1400" dirty="0" err="1"/>
+              <a:t>didukung</a:t>
+            </a:r>
+            <a:r>
+              <a:rPr sz="1400" dirty="0"/>
+              <a:t> </a:t>
+            </a:r>
+            <a:r>
+              <a:rPr sz="1400" dirty="0" err="1"/>
+              <a:t>SortableJS</a:t>
+            </a:r>
+            <a:r>
+              <a:rPr sz="1400" dirty="0"/>
+              <a:t> drag-and-drop dan auto-done 100% checklist sub-</a:t>
+            </a:r>
+            <a:r>
+              <a:rPr sz="1400" dirty="0" err="1"/>
+              <a:t>tugas</a:t>
+            </a:r>
+            <a:r>
+              <a:rPr sz="1400" dirty="0"/>
+              <a:t>.</a:t>
             </a:r>
           </a:p>
         </p:txBody>
@@ -5367,6 +6475,7 @@
           <a:lstStyle/>
           <a:p>
             <a:pPr algn="ctr"/>
+            <a:endParaRPr/>
           </a:p>
         </p:txBody>
       </p:sp>
@@ -5406,7 +6515,7 @@
           </a:fontRef>
         </p:style>
         <p:txBody>
-          <a:bodyPr rtlCol="0" anchor="ctr" wrap="none" lIns="0" rIns="0" tIns="0" bIns="0"/>
+          <a:bodyPr wrap="none" lIns="0" tIns="0" rIns="0" bIns="0" rtlCol="0" anchor="ctr"/>
           <a:lstStyle/>
           <a:p>
             <a:pPr algn="ctr">
@@ -5432,7 +6541,7 @@
         <p:spPr>
           <a:xfrm>
             <a:off x="2103120" y="3794760"/>
-            <a:ext cx="3566160" cy="1645920"/>
+            <a:ext cx="3566160" cy="1268874"/>
           </a:xfrm>
           <a:prstGeom prst="rect">
             <a:avLst/>
@@ -5440,7 +6549,7 @@
           <a:noFill/>
         </p:spPr>
         <p:txBody>
-          <a:bodyPr wrap="square" lIns="0" rIns="0" tIns="0" bIns="0">
+          <a:bodyPr wrap="square" lIns="0" tIns="0" rIns="0" bIns="0">
             <a:spAutoFit/>
           </a:bodyPr>
           <a:lstStyle/>
@@ -5456,6 +6565,7 @@
               </a:defRPr>
             </a:pPr>
             <a:r>
+              <a:rPr dirty="0"/>
               <a:t>WhatsApp Gateway Reminder</a:t>
             </a:r>
           </a:p>
@@ -5471,7 +6581,100 @@
               </a:defRPr>
             </a:pPr>
             <a:r>
-              <a:t>Pengingat otomatis tenggat waktu H-5 &amp; H-2 sebelum batas waktu berakhir secara terjadwal (Laravel Cron Scheduler) langsung ke WhatsApp via Fonnte API.</a:t>
+              <a:rPr sz="1400" dirty="0" err="1"/>
+              <a:t>Pengingat</a:t>
+            </a:r>
+            <a:r>
+              <a:rPr sz="1400" dirty="0"/>
+              <a:t> </a:t>
+            </a:r>
+            <a:r>
+              <a:rPr sz="1400" dirty="0" err="1"/>
+              <a:t>otomatis</a:t>
+            </a:r>
+            <a:r>
+              <a:rPr sz="1400" dirty="0"/>
+              <a:t> </a:t>
+            </a:r>
+            <a:r>
+              <a:rPr sz="1400" dirty="0" err="1"/>
+              <a:t>tenggat</a:t>
+            </a:r>
+            <a:r>
+              <a:rPr sz="1400" dirty="0"/>
+              <a:t> </a:t>
+            </a:r>
+            <a:r>
+              <a:rPr sz="1400" dirty="0" err="1"/>
+              <a:t>waktu</a:t>
+            </a:r>
+            <a:r>
+              <a:rPr sz="1400" dirty="0"/>
+              <a:t> H-5 &amp; H-2 </a:t>
+            </a:r>
+            <a:r>
+              <a:rPr sz="1400" dirty="0" err="1"/>
+              <a:t>sebelum</a:t>
+            </a:r>
+            <a:r>
+              <a:rPr sz="1400" dirty="0"/>
+              <a:t> batas </a:t>
+            </a:r>
+            <a:r>
+              <a:rPr sz="1400" dirty="0" err="1"/>
+              <a:t>waktu</a:t>
+            </a:r>
+            <a:r>
+              <a:rPr sz="1400" dirty="0"/>
+              <a:t> </a:t>
+            </a:r>
+            <a:r>
+              <a:rPr sz="1400" dirty="0" err="1"/>
+              <a:t>berakhir</a:t>
+            </a:r>
+            <a:r>
+              <a:rPr sz="1400" dirty="0"/>
+              <a:t> </a:t>
+            </a:r>
+            <a:r>
+              <a:rPr sz="1400" dirty="0" err="1"/>
+              <a:t>secara</a:t>
+            </a:r>
+            <a:r>
+              <a:rPr sz="1400" dirty="0"/>
+              <a:t> </a:t>
+            </a:r>
+            <a:r>
+              <a:rPr sz="1400" dirty="0" err="1"/>
+              <a:t>terjadwal</a:t>
+            </a:r>
+            <a:r>
+              <a:rPr sz="1400" dirty="0"/>
+              <a:t> (Laravel Cron Scheduler) </a:t>
+            </a:r>
+            <a:r>
+              <a:rPr sz="1400" dirty="0" err="1"/>
+              <a:t>langsung</a:t>
+            </a:r>
+            <a:r>
+              <a:rPr sz="1400" dirty="0"/>
+              <a:t> </a:t>
+            </a:r>
+            <a:r>
+              <a:rPr sz="1400" dirty="0" err="1"/>
+              <a:t>ke</a:t>
+            </a:r>
+            <a:r>
+              <a:rPr sz="1400" dirty="0"/>
+              <a:t> WhatsApp via </a:t>
+            </a:r>
+            <a:r>
+              <a:rPr sz="1400" dirty="0" err="1"/>
+              <a:t>Fonnte</a:t>
+            </a:r>
+            <a:r>
+              <a:rPr sz="1400" dirty="0"/>
+              <a:t> API.</a:t>
             </a:r>
           </a:p>
         </p:txBody>
@@ -5518,6 +6721,7 @@
           <a:lstStyle/>
           <a:p>
             <a:pPr algn="ctr"/>
+            <a:endParaRPr/>
           </a:p>
         </p:txBody>
       </p:sp>
@@ -5557,7 +6761,7 @@
           </a:fontRef>
         </p:style>
         <p:txBody>
-          <a:bodyPr rtlCol="0" anchor="ctr" wrap="none" lIns="0" rIns="0" tIns="0" bIns="0"/>
+          <a:bodyPr wrap="none" lIns="0" tIns="0" rIns="0" bIns="0" rtlCol="0" anchor="ctr"/>
           <a:lstStyle/>
           <a:p>
             <a:pPr algn="ctr">
@@ -5583,7 +6787,7 @@
         <p:spPr>
           <a:xfrm>
             <a:off x="7589520" y="3794760"/>
-            <a:ext cx="3566160" cy="1645920"/>
+            <a:ext cx="3566160" cy="1021113"/>
           </a:xfrm>
           <a:prstGeom prst="rect">
             <a:avLst/>
@@ -5591,7 +6795,7 @@
           <a:noFill/>
         </p:spPr>
         <p:txBody>
-          <a:bodyPr wrap="square" lIns="0" rIns="0" tIns="0" bIns="0">
+          <a:bodyPr wrap="square" lIns="0" tIns="0" rIns="0" bIns="0">
             <a:spAutoFit/>
           </a:bodyPr>
           <a:lstStyle/>
@@ -5607,6 +6811,7 @@
               </a:defRPr>
             </a:pPr>
             <a:r>
+              <a:rPr dirty="0"/>
               <a:t>Live Monitoring &amp; Audit Log</a:t>
             </a:r>
           </a:p>
@@ -5622,7 +6827,72 @@
               </a:defRPr>
             </a:pPr>
             <a:r>
-              <a:t>Dasbor analitik monitoring progres board mahasiswa secara real-time dan tracking audit trail log aktivitas sistem untuk transparansi.</a:t>
+              <a:rPr sz="1400" dirty="0"/>
+              <a:t>Dasbor </a:t>
+            </a:r>
+            <a:r>
+              <a:rPr sz="1400" dirty="0" err="1"/>
+              <a:t>analitik</a:t>
+            </a:r>
+            <a:r>
+              <a:rPr sz="1400" dirty="0"/>
+              <a:t> monitoring </a:t>
+            </a:r>
+            <a:r>
+              <a:rPr sz="1400" dirty="0" err="1"/>
+              <a:t>progres</a:t>
+            </a:r>
+            <a:r>
+              <a:rPr sz="1400" dirty="0"/>
+              <a:t> board </a:t>
+            </a:r>
+            <a:r>
+              <a:rPr sz="1400" dirty="0" err="1"/>
+              <a:t>mahasiswa</a:t>
+            </a:r>
+            <a:r>
+              <a:rPr sz="1400" dirty="0"/>
+              <a:t> </a:t>
+            </a:r>
+            <a:r>
+              <a:rPr sz="1400" dirty="0" err="1"/>
+              <a:t>secara</a:t>
+            </a:r>
+            <a:r>
+              <a:rPr sz="1400" dirty="0"/>
+              <a:t> real-time dan tracking audit trail log </a:t>
+            </a:r>
+            <a:r>
+              <a:rPr sz="1400" dirty="0" err="1"/>
+              <a:t>aktivitas</a:t>
+            </a:r>
+            <a:r>
+              <a:rPr sz="1400" dirty="0"/>
+              <a:t> </a:t>
+            </a:r>
+            <a:r>
+              <a:rPr sz="1400" dirty="0" err="1"/>
+              <a:t>sistem</a:t>
+            </a:r>
+            <a:r>
+              <a:rPr sz="1400" dirty="0"/>
+              <a:t> </a:t>
+            </a:r>
+            <a:r>
+              <a:rPr sz="1400" dirty="0" err="1"/>
+              <a:t>untuk</a:t>
+            </a:r>
+            <a:r>
+              <a:rPr sz="1400" dirty="0"/>
+              <a:t> </a:t>
+            </a:r>
+            <a:r>
+              <a:rPr sz="1400" dirty="0" err="1"/>
+              <a:t>transparansi</a:t>
+            </a:r>
+            <a:r>
+              <a:rPr sz="1400" dirty="0"/>
+              <a:t>.</a:t>
             </a:r>
           </a:p>
         </p:txBody>
@@ -5636,7 +6906,7 @@
 </file>
 
 <file path=ppt/slides/slide4.xml><?xml version="1.0" encoding="utf-8"?>
-<p:sld xmlns:a="http://schemas.openxmlformats.org/drawingml/2006/main" xmlns:p="http://schemas.openxmlformats.org/presentationml/2006/main" xmlns:r="http://schemas.openxmlformats.org/officeDocument/2006/relationships">
+<p:sld xmlns:a="http://schemas.openxmlformats.org/drawingml/2006/main" xmlns:r="http://schemas.openxmlformats.org/officeDocument/2006/relationships" xmlns:p="http://schemas.openxmlformats.org/presentationml/2006/main">
   <p:cSld>
     <p:spTree>
       <p:nvGrpSpPr>
@@ -5644,7 +6914,14 @@
         <p:cNvGrpSpPr/>
         <p:nvPr/>
       </p:nvGrpSpPr>
-      <p:grpSpPr/>
+      <p:grpSpPr>
+        <a:xfrm>
+          <a:off x="0" y="0"/>
+          <a:ext cx="0" cy="0"/>
+          <a:chOff x="0" y="0"/>
+          <a:chExt cx="0" cy="0"/>
+        </a:xfrm>
+      </p:grpSpPr>
       <p:sp>
         <p:nvSpPr>
           <p:cNvPr id="2" name="Rectangle 1"/>
@@ -5685,6 +6962,7 @@
           <a:lstStyle/>
           <a:p>
             <a:pPr algn="ctr"/>
+            <a:endParaRPr/>
           </a:p>
         </p:txBody>
       </p:sp>
@@ -5728,6 +7006,7 @@
           <a:lstStyle/>
           <a:p>
             <a:pPr algn="ctr"/>
+            <a:endParaRPr/>
           </a:p>
         </p:txBody>
       </p:sp>
@@ -5748,7 +7027,7 @@
           <a:noFill/>
         </p:spPr>
         <p:txBody>
-          <a:bodyPr wrap="square" lIns="0" rIns="0" tIns="0" bIns="0">
+          <a:bodyPr wrap="square" lIns="0" tIns="0" rIns="0" bIns="0">
             <a:spAutoFit/>
           </a:bodyPr>
           <a:lstStyle/>
@@ -5784,7 +7063,7 @@
           <a:noFill/>
         </p:spPr>
         <p:txBody>
-          <a:bodyPr wrap="square" lIns="0" rIns="0" tIns="0" bIns="0">
+          <a:bodyPr wrap="square" lIns="0" tIns="0" rIns="0" bIns="0">
             <a:spAutoFit/>
           </a:bodyPr>
           <a:lstStyle/>
@@ -5820,7 +7099,7 @@
           <a:noFill/>
         </p:spPr>
         <p:txBody>
-          <a:bodyPr wrap="none" lIns="0" rIns="0" tIns="0" bIns="0">
+          <a:bodyPr wrap="none" lIns="0" tIns="0" rIns="0" bIns="0">
             <a:spAutoFit/>
           </a:bodyPr>
           <a:lstStyle/>
@@ -5879,6 +7158,7 @@
           <a:lstStyle/>
           <a:p>
             <a:pPr algn="ctr"/>
+            <a:endParaRPr/>
           </a:p>
         </p:txBody>
       </p:sp>
@@ -5924,6 +7204,7 @@
           <a:lstStyle/>
           <a:p>
             <a:pPr algn="ctr"/>
+            <a:endParaRPr/>
           </a:p>
         </p:txBody>
       </p:sp>
@@ -5944,7 +7225,7 @@
           <a:noFill/>
         </p:spPr>
         <p:txBody>
-          <a:bodyPr wrap="none" lIns="0" rIns="0" tIns="0">
+          <a:bodyPr wrap="none" lIns="0" tIns="0" rIns="0">
             <a:spAutoFit/>
           </a:bodyPr>
           <a:lstStyle/>
@@ -5998,7 +7279,7 @@
           </a:fontRef>
         </p:style>
         <p:txBody>
-          <a:bodyPr rtlCol="0" anchor="ctr" wrap="none" lIns="0" rIns="0" tIns="0" bIns="0"/>
+          <a:bodyPr wrap="none" lIns="0" tIns="0" rIns="0" bIns="0" rtlCol="0" anchor="ctr"/>
           <a:lstStyle/>
           <a:p>
             <a:pPr algn="ctr">
@@ -6024,7 +7305,7 @@
         <p:spPr>
           <a:xfrm>
             <a:off x="1554480" y="1783080"/>
-            <a:ext cx="4206240" cy="731520"/>
+            <a:ext cx="4206240" cy="441146"/>
           </a:xfrm>
           <a:prstGeom prst="rect">
             <a:avLst/>
@@ -6032,20 +7313,33 @@
           <a:noFill/>
         </p:spPr>
         <p:txBody>
-          <a:bodyPr wrap="square" lIns="0" rIns="0" tIns="0">
+          <a:bodyPr wrap="square" lIns="0" tIns="0" rIns="0">
             <a:spAutoFit/>
           </a:bodyPr>
           <a:lstStyle/>
           <a:p>
             <a:pPr>
-              <a:defRPr b="1" sz="1100">
+              <a:defRPr sz="1100" b="1">
                 <a:solidFill>
                   <a:srgbClr val="1A1A2E"/>
                 </a:solidFill>
               </a:defRPr>
             </a:pPr>
             <a:r>
-              <a:t>Pilih Kriteria / Modul</a:t>
+              <a:rPr sz="1200" dirty="0" err="1"/>
+              <a:t>Pilih</a:t>
+            </a:r>
+            <a:r>
+              <a:rPr sz="1200" dirty="0"/>
+              <a:t> </a:t>
+            </a:r>
+            <a:r>
+              <a:rPr sz="1200" dirty="0" err="1"/>
+              <a:t>Kriteria</a:t>
+            </a:r>
+            <a:r>
+              <a:rPr sz="1200" dirty="0"/>
+              <a:t> / Modul</a:t>
             </a:r>
           </a:p>
           <a:p>
@@ -6060,7 +7354,52 @@
               </a:defRPr>
             </a:pPr>
             <a:r>
-              <a:t>Mahasiswa input tugas akademik beserta prioritas &amp; sub-tugas.</a:t>
+              <a:rPr sz="1200" dirty="0" err="1"/>
+              <a:t>Mahasiswa</a:t>
+            </a:r>
+            <a:r>
+              <a:rPr sz="1200" dirty="0"/>
+              <a:t> input </a:t>
+            </a:r>
+            <a:r>
+              <a:rPr sz="1200" dirty="0" err="1"/>
+              <a:t>tugas</a:t>
+            </a:r>
+            <a:r>
+              <a:rPr sz="1200" dirty="0"/>
+              <a:t> </a:t>
+            </a:r>
+            <a:r>
+              <a:rPr sz="1200" dirty="0" err="1"/>
+              <a:t>akademik</a:t>
+            </a:r>
+            <a:r>
+              <a:rPr sz="1200" dirty="0"/>
+              <a:t> </a:t>
+            </a:r>
+            <a:r>
+              <a:rPr sz="1200" dirty="0" err="1"/>
+              <a:t>beserta</a:t>
+            </a:r>
+            <a:r>
+              <a:rPr sz="1200" dirty="0"/>
+              <a:t> </a:t>
+            </a:r>
+            <a:r>
+              <a:rPr sz="1200" dirty="0" err="1"/>
+              <a:t>prioritas</a:t>
+            </a:r>
+            <a:r>
+              <a:rPr sz="1200" dirty="0"/>
+              <a:t> &amp; sub-</a:t>
+            </a:r>
+            <a:r>
+              <a:rPr sz="1200" dirty="0" err="1"/>
+              <a:t>tugas</a:t>
+            </a:r>
+            <a:r>
+              <a:rPr sz="1200" dirty="0"/>
+              <a:t>.</a:t>
             </a:r>
           </a:p>
         </p:txBody>
@@ -6101,7 +7440,7 @@
           </a:fontRef>
         </p:style>
         <p:txBody>
-          <a:bodyPr rtlCol="0" anchor="ctr" wrap="none" lIns="0" rIns="0" tIns="0" bIns="0"/>
+          <a:bodyPr wrap="none" lIns="0" tIns="0" rIns="0" bIns="0" rtlCol="0" anchor="ctr"/>
           <a:lstStyle/>
           <a:p>
             <a:pPr algn="ctr">
@@ -6127,7 +7466,7 @@
         <p:spPr>
           <a:xfrm>
             <a:off x="1554480" y="2560320"/>
-            <a:ext cx="4206240" cy="731520"/>
+            <a:ext cx="4206240" cy="441146"/>
           </a:xfrm>
           <a:prstGeom prst="rect">
             <a:avLst/>
@@ -6135,19 +7474,20 @@
           <a:noFill/>
         </p:spPr>
         <p:txBody>
-          <a:bodyPr wrap="square" lIns="0" rIns="0" tIns="0">
+          <a:bodyPr wrap="square" lIns="0" tIns="0" rIns="0">
             <a:spAutoFit/>
           </a:bodyPr>
           <a:lstStyle/>
           <a:p>
             <a:pPr>
-              <a:defRPr b="1" sz="1100">
+              <a:defRPr sz="1100" b="1">
                 <a:solidFill>
                   <a:srgbClr val="1A1A2E"/>
                 </a:solidFill>
               </a:defRPr>
             </a:pPr>
             <a:r>
+              <a:rPr sz="1200" dirty="0"/>
               <a:t>Kanban Lifecycle</a:t>
             </a:r>
           </a:p>
@@ -6163,7 +7503,28 @@
               </a:defRPr>
             </a:pPr>
             <a:r>
-              <a:t>Menyeret kartu tugas (To Do -&gt; Doing -&gt; Review -&gt; Done) via AJAX.</a:t>
+              <a:rPr sz="1200" dirty="0" err="1"/>
+              <a:t>Menyeret</a:t>
+            </a:r>
+            <a:r>
+              <a:rPr sz="1200" dirty="0"/>
+              <a:t> </a:t>
+            </a:r>
+            <a:r>
+              <a:rPr sz="1200" dirty="0" err="1"/>
+              <a:t>kartu</a:t>
+            </a:r>
+            <a:r>
+              <a:rPr sz="1200" dirty="0"/>
+              <a:t> </a:t>
+            </a:r>
+            <a:r>
+              <a:rPr sz="1200" dirty="0" err="1"/>
+              <a:t>tugas</a:t>
+            </a:r>
+            <a:r>
+              <a:rPr sz="1200" dirty="0"/>
+              <a:t> (To Do -&gt; Doing -&gt; Review -&gt; Done) via AJAX.</a:t>
             </a:r>
           </a:p>
         </p:txBody>
@@ -6204,7 +7565,7 @@
           </a:fontRef>
         </p:style>
         <p:txBody>
-          <a:bodyPr rtlCol="0" anchor="ctr" wrap="none" lIns="0" rIns="0" tIns="0" bIns="0"/>
+          <a:bodyPr wrap="none" lIns="0" tIns="0" rIns="0" bIns="0" rtlCol="0" anchor="ctr"/>
           <a:lstStyle/>
           <a:p>
             <a:pPr algn="ctr">
@@ -6230,7 +7591,7 @@
         <p:spPr>
           <a:xfrm>
             <a:off x="1554480" y="3337560"/>
-            <a:ext cx="4206240" cy="731520"/>
+            <a:ext cx="4206240" cy="441146"/>
           </a:xfrm>
           <a:prstGeom prst="rect">
             <a:avLst/>
@@ -6238,19 +7599,20 @@
           <a:noFill/>
         </p:spPr>
         <p:txBody>
-          <a:bodyPr wrap="square" lIns="0" rIns="0" tIns="0">
+          <a:bodyPr wrap="square" lIns="0" tIns="0" rIns="0">
             <a:spAutoFit/>
           </a:bodyPr>
           <a:lstStyle/>
           <a:p>
             <a:pPr>
-              <a:defRPr b="1" sz="1100">
+              <a:defRPr sz="1100" b="1">
                 <a:solidFill>
                   <a:srgbClr val="1A1A2E"/>
                 </a:solidFill>
               </a:defRPr>
             </a:pPr>
             <a:r>
+              <a:rPr sz="1200" dirty="0"/>
               <a:t>Auto-Done Checklist</a:t>
             </a:r>
           </a:p>
@@ -6266,7 +7628,60 @@
               </a:defRPr>
             </a:pPr>
             <a:r>
-              <a:t>Tugas otomatis bergeser ke 'Done' ketika sub-tugas mencapai 100%.</a:t>
+              <a:rPr sz="1200" dirty="0" err="1"/>
+              <a:t>Tugas</a:t>
+            </a:r>
+            <a:r>
+              <a:rPr sz="1200" dirty="0"/>
+              <a:t> </a:t>
+            </a:r>
+            <a:r>
+              <a:rPr sz="1200" dirty="0" err="1"/>
+              <a:t>otomatis</a:t>
+            </a:r>
+            <a:r>
+              <a:rPr sz="1200" dirty="0"/>
+              <a:t> </a:t>
+            </a:r>
+            <a:r>
+              <a:rPr sz="1200" dirty="0" err="1"/>
+              <a:t>bergeser</a:t>
+            </a:r>
+            <a:r>
+              <a:rPr sz="1200" dirty="0"/>
+              <a:t> </a:t>
+            </a:r>
+            <a:r>
+              <a:rPr sz="1200" dirty="0" err="1"/>
+              <a:t>ke</a:t>
+            </a:r>
+            <a:r>
+              <a:rPr sz="1200" dirty="0"/>
+              <a:t> 'Done' </a:t>
+            </a:r>
+            <a:r>
+              <a:rPr sz="1200" dirty="0" err="1"/>
+              <a:t>ketika</a:t>
+            </a:r>
+            <a:r>
+              <a:rPr sz="1200" dirty="0"/>
+              <a:t> sub-</a:t>
+            </a:r>
+            <a:r>
+              <a:rPr sz="1200" dirty="0" err="1"/>
+              <a:t>tugas</a:t>
+            </a:r>
+            <a:r>
+              <a:rPr sz="1200" dirty="0"/>
+              <a:t> </a:t>
+            </a:r>
+            <a:r>
+              <a:rPr sz="1200" dirty="0" err="1"/>
+              <a:t>mencapai</a:t>
+            </a:r>
+            <a:r>
+              <a:rPr sz="1200" dirty="0"/>
+              <a:t> 100%.</a:t>
             </a:r>
           </a:p>
         </p:txBody>
@@ -6307,7 +7722,7 @@
           </a:fontRef>
         </p:style>
         <p:txBody>
-          <a:bodyPr rtlCol="0" anchor="ctr" wrap="none" lIns="0" rIns="0" tIns="0" bIns="0"/>
+          <a:bodyPr wrap="none" lIns="0" tIns="0" rIns="0" bIns="0" rtlCol="0" anchor="ctr"/>
           <a:lstStyle/>
           <a:p>
             <a:pPr algn="ctr">
@@ -6333,7 +7748,7 @@
         <p:spPr>
           <a:xfrm>
             <a:off x="1554480" y="4114800"/>
-            <a:ext cx="4206240" cy="731520"/>
+            <a:ext cx="4206240" cy="625812"/>
           </a:xfrm>
           <a:prstGeom prst="rect">
             <a:avLst/>
@@ -6341,20 +7756,25 @@
           <a:noFill/>
         </p:spPr>
         <p:txBody>
-          <a:bodyPr wrap="square" lIns="0" rIns="0" tIns="0">
+          <a:bodyPr wrap="square" lIns="0" tIns="0" rIns="0">
             <a:spAutoFit/>
           </a:bodyPr>
           <a:lstStyle/>
           <a:p>
             <a:pPr>
-              <a:defRPr b="1" sz="1100">
+              <a:defRPr sz="1100" b="1">
                 <a:solidFill>
                   <a:srgbClr val="1A1A2E"/>
                 </a:solidFill>
               </a:defRPr>
             </a:pPr>
             <a:r>
-              <a:t>Terima WhatsApp Reminder</a:t>
+              <a:rPr sz="1200" dirty="0" err="1"/>
+              <a:t>Terima</a:t>
+            </a:r>
+            <a:r>
+              <a:rPr sz="1200" dirty="0"/>
+              <a:t> WhatsApp Reminder</a:t>
             </a:r>
           </a:p>
           <a:p>
@@ -6369,7 +7789,36 @@
               </a:defRPr>
             </a:pPr>
             <a:r>
-              <a:t>Notifikasi WA Gateway diterima otomatis H-5 &amp; H-2 sebelum deadline.</a:t>
+              <a:rPr sz="1200" dirty="0" err="1"/>
+              <a:t>Notifikasi</a:t>
+            </a:r>
+            <a:r>
+              <a:rPr sz="1200" dirty="0"/>
+              <a:t> WA Gateway </a:t>
+            </a:r>
+            <a:r>
+              <a:rPr sz="1200" dirty="0" err="1"/>
+              <a:t>diterima</a:t>
+            </a:r>
+            <a:r>
+              <a:rPr sz="1200" dirty="0"/>
+              <a:t> </a:t>
+            </a:r>
+            <a:r>
+              <a:rPr sz="1200" dirty="0" err="1"/>
+              <a:t>otomatis</a:t>
+            </a:r>
+            <a:r>
+              <a:rPr sz="1200" dirty="0"/>
+              <a:t> H-5 &amp; H-2 </a:t>
+            </a:r>
+            <a:r>
+              <a:rPr sz="1200" dirty="0" err="1"/>
+              <a:t>sebelum</a:t>
+            </a:r>
+            <a:r>
+              <a:rPr sz="1200" dirty="0"/>
+              <a:t> deadline.</a:t>
             </a:r>
           </a:p>
         </p:txBody>
@@ -6416,6 +7865,7 @@
           <a:lstStyle/>
           <a:p>
             <a:pPr algn="ctr"/>
+            <a:endParaRPr/>
           </a:p>
         </p:txBody>
       </p:sp>
@@ -6436,7 +7886,7 @@
           <a:noFill/>
         </p:spPr>
         <p:txBody>
-          <a:bodyPr wrap="none" lIns="0" rIns="0" tIns="0">
+          <a:bodyPr wrap="none" lIns="0" tIns="0" rIns="0">
             <a:spAutoFit/>
           </a:bodyPr>
           <a:lstStyle/>
@@ -6490,7 +7940,7 @@
           </a:fontRef>
         </p:style>
         <p:txBody>
-          <a:bodyPr rtlCol="0" anchor="ctr" wrap="none" lIns="0" rIns="0" tIns="0" bIns="0"/>
+          <a:bodyPr wrap="none" lIns="0" tIns="0" rIns="0" bIns="0" rtlCol="0" anchor="ctr"/>
           <a:lstStyle/>
           <a:p>
             <a:pPr algn="ctr">
@@ -6516,7 +7966,7 @@
         <p:spPr>
           <a:xfrm>
             <a:off x="7040880" y="1783080"/>
-            <a:ext cx="4206240" cy="731520"/>
+            <a:ext cx="4206240" cy="441146"/>
           </a:xfrm>
           <a:prstGeom prst="rect">
             <a:avLst/>
@@ -6524,19 +7974,20 @@
           <a:noFill/>
         </p:spPr>
         <p:txBody>
-          <a:bodyPr wrap="square" lIns="0" rIns="0" tIns="0">
+          <a:bodyPr wrap="square" lIns="0" tIns="0" rIns="0">
             <a:spAutoFit/>
           </a:bodyPr>
           <a:lstStyle/>
           <a:p>
             <a:pPr>
-              <a:defRPr b="1" sz="1100">
+              <a:defRPr sz="1100" b="1">
                 <a:solidFill>
                   <a:srgbClr val="1A1A2E"/>
                 </a:solidFill>
               </a:defRPr>
             </a:pPr>
             <a:r>
+              <a:rPr sz="1200" dirty="0"/>
               <a:t>Akses Dashboard Admin</a:t>
             </a:r>
           </a:p>
@@ -6552,7 +8003,52 @@
               </a:defRPr>
             </a:pPr>
             <a:r>
-              <a:t>Memantau performa, grafik tugas, dan statistik keaktifan global.</a:t>
+              <a:rPr sz="1200" dirty="0" err="1"/>
+              <a:t>Memantau</a:t>
+            </a:r>
+            <a:r>
+              <a:rPr sz="1200" dirty="0"/>
+              <a:t> </a:t>
+            </a:r>
+            <a:r>
+              <a:rPr sz="1200" dirty="0" err="1"/>
+              <a:t>performa</a:t>
+            </a:r>
+            <a:r>
+              <a:rPr sz="1200" dirty="0"/>
+              <a:t>, </a:t>
+            </a:r>
+            <a:r>
+              <a:rPr sz="1200" dirty="0" err="1"/>
+              <a:t>grafik</a:t>
+            </a:r>
+            <a:r>
+              <a:rPr sz="1200" dirty="0"/>
+              <a:t> </a:t>
+            </a:r>
+            <a:r>
+              <a:rPr sz="1200" dirty="0" err="1"/>
+              <a:t>tugas</a:t>
+            </a:r>
+            <a:r>
+              <a:rPr sz="1200" dirty="0"/>
+              <a:t>, dan </a:t>
+            </a:r>
+            <a:r>
+              <a:rPr sz="1200" dirty="0" err="1"/>
+              <a:t>statistik</a:t>
+            </a:r>
+            <a:r>
+              <a:rPr sz="1200" dirty="0"/>
+              <a:t> </a:t>
+            </a:r>
+            <a:r>
+              <a:rPr sz="1200" dirty="0" err="1"/>
+              <a:t>keaktifan</a:t>
+            </a:r>
+            <a:r>
+              <a:rPr sz="1200" dirty="0"/>
+              <a:t> global.</a:t>
             </a:r>
           </a:p>
         </p:txBody>
@@ -6593,7 +8089,7 @@
           </a:fontRef>
         </p:style>
         <p:txBody>
-          <a:bodyPr rtlCol="0" anchor="ctr" wrap="none" lIns="0" rIns="0" tIns="0" bIns="0"/>
+          <a:bodyPr wrap="none" lIns="0" tIns="0" rIns="0" bIns="0" rtlCol="0" anchor="ctr"/>
           <a:lstStyle/>
           <a:p>
             <a:pPr algn="ctr">
@@ -6619,7 +8115,7 @@
         <p:spPr>
           <a:xfrm>
             <a:off x="7040880" y="2560320"/>
-            <a:ext cx="4206240" cy="731520"/>
+            <a:ext cx="4206240" cy="441146"/>
           </a:xfrm>
           <a:prstGeom prst="rect">
             <a:avLst/>
@@ -6627,19 +8123,20 @@
           <a:noFill/>
         </p:spPr>
         <p:txBody>
-          <a:bodyPr wrap="square" lIns="0" rIns="0" tIns="0">
+          <a:bodyPr wrap="square" lIns="0" tIns="0" rIns="0">
             <a:spAutoFit/>
           </a:bodyPr>
           <a:lstStyle/>
           <a:p>
             <a:pPr>
-              <a:defRPr b="1" sz="1100">
+              <a:defRPr sz="1100" b="1">
                 <a:solidFill>
                   <a:srgbClr val="1A1A2E"/>
                 </a:solidFill>
               </a:defRPr>
             </a:pPr>
             <a:r>
+              <a:rPr sz="1200" dirty="0"/>
               <a:t>Live Board Monitoring</a:t>
             </a:r>
           </a:p>
@@ -6655,7 +8152,28 @@
               </a:defRPr>
             </a:pPr>
             <a:r>
-              <a:t>Mengecek progres Kanban board live masing-masing mahasiswa.</a:t>
+              <a:rPr sz="1200" dirty="0" err="1"/>
+              <a:t>Mengecek</a:t>
+            </a:r>
+            <a:r>
+              <a:rPr sz="1200" dirty="0"/>
+              <a:t> </a:t>
+            </a:r>
+            <a:r>
+              <a:rPr sz="1200" dirty="0" err="1"/>
+              <a:t>progres</a:t>
+            </a:r>
+            <a:r>
+              <a:rPr sz="1200" dirty="0"/>
+              <a:t> Kanban board live masing-masing </a:t>
+            </a:r>
+            <a:r>
+              <a:rPr sz="1200" dirty="0" err="1"/>
+              <a:t>mahasiswa</a:t>
+            </a:r>
+            <a:r>
+              <a:rPr sz="1200" dirty="0"/>
+              <a:t>.</a:t>
             </a:r>
           </a:p>
         </p:txBody>
@@ -6696,7 +8214,7 @@
           </a:fontRef>
         </p:style>
         <p:txBody>
-          <a:bodyPr rtlCol="0" anchor="ctr" wrap="none" lIns="0" rIns="0" tIns="0" bIns="0"/>
+          <a:bodyPr wrap="none" lIns="0" tIns="0" rIns="0" bIns="0" rtlCol="0" anchor="ctr"/>
           <a:lstStyle/>
           <a:p>
             <a:pPr algn="ctr">
@@ -6722,7 +8240,7 @@
         <p:spPr>
           <a:xfrm>
             <a:off x="7040880" y="3337560"/>
-            <a:ext cx="4206240" cy="731520"/>
+            <a:ext cx="4206240" cy="441146"/>
           </a:xfrm>
           <a:prstGeom prst="rect">
             <a:avLst/>
@@ -6730,19 +8248,20 @@
           <a:noFill/>
         </p:spPr>
         <p:txBody>
-          <a:bodyPr wrap="square" lIns="0" rIns="0" tIns="0">
+          <a:bodyPr wrap="square" lIns="0" tIns="0" rIns="0">
             <a:spAutoFit/>
           </a:bodyPr>
           <a:lstStyle/>
           <a:p>
             <a:pPr>
-              <a:defRPr b="1" sz="1100">
+              <a:defRPr sz="1100" b="1">
                 <a:solidFill>
                   <a:srgbClr val="1A1A2E"/>
                 </a:solidFill>
               </a:defRPr>
             </a:pPr>
             <a:r>
+              <a:rPr sz="1200" dirty="0"/>
               <a:t>Audit Log Activity</a:t>
             </a:r>
           </a:p>
@@ -6758,7 +8277,36 @@
               </a:defRPr>
             </a:pPr>
             <a:r>
-              <a:t>Memverifikasi log audit trail digital transaksi tindakan mahasiswa.</a:t>
+              <a:rPr sz="1200" dirty="0" err="1"/>
+              <a:t>Memverifikasi</a:t>
+            </a:r>
+            <a:r>
+              <a:rPr sz="1200" dirty="0"/>
+              <a:t> log audit trail digital </a:t>
+            </a:r>
+            <a:r>
+              <a:rPr sz="1200" dirty="0" err="1"/>
+              <a:t>transaksi</a:t>
+            </a:r>
+            <a:r>
+              <a:rPr sz="1200" dirty="0"/>
+              <a:t> </a:t>
+            </a:r>
+            <a:r>
+              <a:rPr sz="1200" dirty="0" err="1"/>
+              <a:t>tindakan</a:t>
+            </a:r>
+            <a:r>
+              <a:rPr sz="1200" dirty="0"/>
+              <a:t> </a:t>
+            </a:r>
+            <a:r>
+              <a:rPr sz="1200" dirty="0" err="1"/>
+              <a:t>mahasiswa</a:t>
+            </a:r>
+            <a:r>
+              <a:rPr sz="1200" dirty="0"/>
+              <a:t>.</a:t>
             </a:r>
           </a:p>
         </p:txBody>
@@ -6799,7 +8347,7 @@
           </a:fontRef>
         </p:style>
         <p:txBody>
-          <a:bodyPr rtlCol="0" anchor="ctr" wrap="none" lIns="0" rIns="0" tIns="0" bIns="0"/>
+          <a:bodyPr wrap="none" lIns="0" tIns="0" rIns="0" bIns="0" rtlCol="0" anchor="ctr"/>
           <a:lstStyle/>
           <a:p>
             <a:pPr algn="ctr">
@@ -6825,7 +8373,7 @@
         <p:spPr>
           <a:xfrm>
             <a:off x="7040880" y="4114800"/>
-            <a:ext cx="4206240" cy="731520"/>
+            <a:ext cx="4206240" cy="625812"/>
           </a:xfrm>
           <a:prstGeom prst="rect">
             <a:avLst/>
@@ -6833,19 +8381,20 @@
           <a:noFill/>
         </p:spPr>
         <p:txBody>
-          <a:bodyPr wrap="square" lIns="0" rIns="0" tIns="0">
+          <a:bodyPr wrap="square" lIns="0" tIns="0" rIns="0">
             <a:spAutoFit/>
           </a:bodyPr>
           <a:lstStyle/>
           <a:p>
             <a:pPr>
-              <a:defRPr b="1" sz="1100">
+              <a:defRPr sz="1100" b="1">
                 <a:solidFill>
                   <a:srgbClr val="1A1A2E"/>
                 </a:solidFill>
               </a:defRPr>
             </a:pPr>
             <a:r>
+              <a:rPr sz="1200" dirty="0"/>
               <a:t>Trigger WhatsApp Scheduler</a:t>
             </a:r>
           </a:p>
@@ -6861,7 +8410,44 @@
               </a:defRPr>
             </a:pPr>
             <a:r>
-              <a:t>Memicu pengiriman reminder terjadwal lewat CLI command Fonnte.</a:t>
+              <a:rPr sz="1200" dirty="0" err="1"/>
+              <a:t>Memicu</a:t>
+            </a:r>
+            <a:r>
+              <a:rPr sz="1200" dirty="0"/>
+              <a:t> </a:t>
+            </a:r>
+            <a:r>
+              <a:rPr sz="1200" dirty="0" err="1"/>
+              <a:t>pengiriman</a:t>
+            </a:r>
+            <a:r>
+              <a:rPr sz="1200" dirty="0"/>
+              <a:t> reminder </a:t>
+            </a:r>
+            <a:r>
+              <a:rPr sz="1200" dirty="0" err="1"/>
+              <a:t>terjadwal</a:t>
+            </a:r>
+            <a:r>
+              <a:rPr sz="1200" dirty="0"/>
+              <a:t> </a:t>
+            </a:r>
+            <a:r>
+              <a:rPr sz="1200" dirty="0" err="1"/>
+              <a:t>lewat</a:t>
+            </a:r>
+            <a:r>
+              <a:rPr sz="1200" dirty="0"/>
+              <a:t> CLI command </a:t>
+            </a:r>
+            <a:r>
+              <a:rPr sz="1200" dirty="0" err="1"/>
+              <a:t>Fonnte</a:t>
+            </a:r>
+            <a:r>
+              <a:rPr sz="1200" dirty="0"/>
+              <a:t>.</a:t>
             </a:r>
           </a:p>
         </p:txBody>
@@ -6902,7 +8488,7 @@
           </a:fontRef>
         </p:style>
         <p:txBody>
-          <a:bodyPr rtlCol="0" anchor="ctr" wrap="square"/>
+          <a:bodyPr wrap="square" rtlCol="0" anchor="ctr"/>
           <a:lstStyle/>
           <a:p>
             <a:pPr algn="ctr">
@@ -6928,7 +8514,7 @@
 </file>
 
 <file path=ppt/slides/slide5.xml><?xml version="1.0" encoding="utf-8"?>
-<p:sld xmlns:a="http://schemas.openxmlformats.org/drawingml/2006/main" xmlns:p="http://schemas.openxmlformats.org/presentationml/2006/main" xmlns:r="http://schemas.openxmlformats.org/officeDocument/2006/relationships">
+<p:sld xmlns:a="http://schemas.openxmlformats.org/drawingml/2006/main" xmlns:r="http://schemas.openxmlformats.org/officeDocument/2006/relationships" xmlns:p="http://schemas.openxmlformats.org/presentationml/2006/main">
   <p:cSld>
     <p:spTree>
       <p:nvGrpSpPr>
@@ -6936,7 +8522,14 @@
         <p:cNvGrpSpPr/>
         <p:nvPr/>
       </p:nvGrpSpPr>
-      <p:grpSpPr/>
+      <p:grpSpPr>
+        <a:xfrm>
+          <a:off x="0" y="0"/>
+          <a:ext cx="0" cy="0"/>
+          <a:chOff x="0" y="0"/>
+          <a:chExt cx="0" cy="0"/>
+        </a:xfrm>
+      </p:grpSpPr>
       <p:sp>
         <p:nvSpPr>
           <p:cNvPr id="2" name="Rectangle 1"/>
@@ -6977,6 +8570,7 @@
           <a:lstStyle/>
           <a:p>
             <a:pPr algn="ctr"/>
+            <a:endParaRPr/>
           </a:p>
         </p:txBody>
       </p:sp>
@@ -7020,6 +8614,7 @@
           <a:lstStyle/>
           <a:p>
             <a:pPr algn="ctr"/>
+            <a:endParaRPr/>
           </a:p>
         </p:txBody>
       </p:sp>
@@ -7040,7 +8635,7 @@
           <a:noFill/>
         </p:spPr>
         <p:txBody>
-          <a:bodyPr wrap="square" lIns="0" rIns="0" tIns="0" bIns="0">
+          <a:bodyPr wrap="square" lIns="0" tIns="0" rIns="0" bIns="0">
             <a:spAutoFit/>
           </a:bodyPr>
           <a:lstStyle/>
@@ -7076,7 +8671,7 @@
           <a:noFill/>
         </p:spPr>
         <p:txBody>
-          <a:bodyPr wrap="square" lIns="0" rIns="0" tIns="0" bIns="0">
+          <a:bodyPr wrap="square" lIns="0" tIns="0" rIns="0" bIns="0">
             <a:spAutoFit/>
           </a:bodyPr>
           <a:lstStyle/>
@@ -7112,7 +8707,7 @@
           <a:noFill/>
         </p:spPr>
         <p:txBody>
-          <a:bodyPr wrap="none" lIns="0" rIns="0" tIns="0" bIns="0">
+          <a:bodyPr wrap="none" lIns="0" tIns="0" rIns="0" bIns="0">
             <a:spAutoFit/>
           </a:bodyPr>
           <a:lstStyle/>
@@ -7171,6 +8766,7 @@
           <a:lstStyle/>
           <a:p>
             <a:pPr algn="ctr"/>
+            <a:endParaRPr/>
           </a:p>
         </p:txBody>
       </p:sp>
@@ -7216,6 +8812,7 @@
           <a:lstStyle/>
           <a:p>
             <a:pPr algn="ctr"/>
+            <a:endParaRPr/>
           </a:p>
         </p:txBody>
       </p:sp>
@@ -7255,7 +8852,7 @@
           </a:fontRef>
         </p:style>
         <p:txBody>
-          <a:bodyPr rtlCol="0" anchor="ctr" wrap="none" lIns="0" rIns="0" tIns="0" bIns="0"/>
+          <a:bodyPr wrap="none" lIns="0" tIns="0" rIns="0" bIns="0" rtlCol="0" anchor="ctr"/>
           <a:lstStyle/>
           <a:p>
             <a:pPr algn="ctr">
@@ -7289,7 +8886,7 @@
           <a:noFill/>
         </p:spPr>
         <p:txBody>
-          <a:bodyPr wrap="none" lIns="0" rIns="0" tIns="0">
+          <a:bodyPr wrap="none" lIns="0" tIns="0" rIns="0">
             <a:spAutoFit/>
           </a:bodyPr>
           <a:lstStyle/>
@@ -7302,8 +8899,14 @@
               </a:defRPr>
             </a:pPr>
             <a:r>
-              <a:t>Kesimpulan Implementasi</a:t>
-            </a:r>
+              <a:rPr dirty="0"/>
+              <a:t>Kesimpulan </a:t>
+            </a:r>
+            <a:r>
+              <a:rPr dirty="0" err="1"/>
+              <a:t>Implementasi</a:t>
+            </a:r>
+            <a:endParaRPr dirty="0"/>
           </a:p>
         </p:txBody>
       </p:sp>
@@ -7343,7 +8946,7 @@
           </a:fontRef>
         </p:style>
         <p:txBody>
-          <a:bodyPr rtlCol="0" anchor="ctr" wrap="none" lIns="0" rIns="0" tIns="0" bIns="0"/>
+          <a:bodyPr wrap="none" lIns="0" tIns="0" rIns="0" bIns="0" rtlCol="0" anchor="ctr"/>
           <a:lstStyle/>
           <a:p>
             <a:pPr algn="ctr">
@@ -7369,7 +8972,7 @@
         <p:spPr>
           <a:xfrm>
             <a:off x="1508760" y="1874520"/>
-            <a:ext cx="4572000" cy="914400"/>
+            <a:ext cx="4572000" cy="641201"/>
           </a:xfrm>
           <a:prstGeom prst="rect">
             <a:avLst/>
@@ -7377,21 +8980,31 @@
           <a:noFill/>
         </p:spPr>
         <p:txBody>
-          <a:bodyPr wrap="square" lIns="0" rIns="0" tIns="0">
+          <a:bodyPr wrap="square" lIns="0" tIns="0" rIns="0">
             <a:spAutoFit/>
           </a:bodyPr>
           <a:lstStyle/>
           <a:p>
             <a:pPr>
-              <a:defRPr b="1" sz="1150">
+              <a:defRPr sz="1150" b="1">
                 <a:solidFill>
                   <a:srgbClr val="1A1A2E"/>
                 </a:solidFill>
               </a:defRPr>
             </a:pPr>
             <a:r>
-              <a:t>Mendigitalisasi Papan Kerja</a:t>
-            </a:r>
+              <a:rPr sz="1300" dirty="0" err="1"/>
+              <a:t>Mendigitalisasi</a:t>
+            </a:r>
+            <a:r>
+              <a:rPr sz="1300" dirty="0"/>
+              <a:t> Papan </a:t>
+            </a:r>
+            <a:r>
+              <a:rPr sz="1300" dirty="0" err="1"/>
+              <a:t>Kerja</a:t>
+            </a:r>
+            <a:endParaRPr sz="1300" dirty="0"/>
           </a:p>
           <a:p>
             <a:pPr>
@@ -7405,7 +9018,44 @@
               </a:defRPr>
             </a:pPr>
             <a:r>
-              <a:t>Mengubah sistem pencatatan manual menjadi visual Kanban Board terpusat.</a:t>
+              <a:rPr sz="1200" dirty="0" err="1"/>
+              <a:t>Mengubah</a:t>
+            </a:r>
+            <a:r>
+              <a:rPr sz="1200" dirty="0"/>
+              <a:t> </a:t>
+            </a:r>
+            <a:r>
+              <a:rPr sz="1200" dirty="0" err="1"/>
+              <a:t>sistem</a:t>
+            </a:r>
+            <a:r>
+              <a:rPr sz="1200" dirty="0"/>
+              <a:t> </a:t>
+            </a:r>
+            <a:r>
+              <a:rPr sz="1200" dirty="0" err="1"/>
+              <a:t>pencatatan</a:t>
+            </a:r>
+            <a:r>
+              <a:rPr sz="1200" dirty="0"/>
+              <a:t> manual </a:t>
+            </a:r>
+            <a:r>
+              <a:rPr sz="1200" dirty="0" err="1"/>
+              <a:t>menjadi</a:t>
+            </a:r>
+            <a:r>
+              <a:rPr sz="1200" dirty="0"/>
+              <a:t> visual Kanban Board </a:t>
+            </a:r>
+            <a:r>
+              <a:rPr sz="1200" dirty="0" err="1"/>
+              <a:t>terpusat</a:t>
+            </a:r>
+            <a:r>
+              <a:rPr sz="1200" dirty="0"/>
+              <a:t>.</a:t>
             </a:r>
           </a:p>
         </p:txBody>
@@ -7446,7 +9096,7 @@
           </a:fontRef>
         </p:style>
         <p:txBody>
-          <a:bodyPr rtlCol="0" anchor="ctr" wrap="none" lIns="0" rIns="0" tIns="0" bIns="0"/>
+          <a:bodyPr wrap="none" lIns="0" tIns="0" rIns="0" bIns="0" rtlCol="0" anchor="ctr"/>
           <a:lstStyle/>
           <a:p>
             <a:pPr algn="ctr">
@@ -7472,7 +9122,7 @@
         <p:spPr>
           <a:xfrm>
             <a:off x="1508760" y="2880360"/>
-            <a:ext cx="4572000" cy="914400"/>
+            <a:ext cx="4572000" cy="641201"/>
           </a:xfrm>
           <a:prstGeom prst="rect">
             <a:avLst/>
@@ -7480,20 +9130,25 @@
           <a:noFill/>
         </p:spPr>
         <p:txBody>
-          <a:bodyPr wrap="square" lIns="0" rIns="0" tIns="0">
+          <a:bodyPr wrap="square" lIns="0" tIns="0" rIns="0">
             <a:spAutoFit/>
           </a:bodyPr>
           <a:lstStyle/>
           <a:p>
             <a:pPr>
-              <a:defRPr b="1" sz="1150">
+              <a:defRPr sz="1150" b="1">
                 <a:solidFill>
                   <a:srgbClr val="1A1A2E"/>
                 </a:solidFill>
               </a:defRPr>
             </a:pPr>
             <a:r>
-              <a:t>Efektivitas WhatsApp Gateway</a:t>
+              <a:rPr sz="1300" dirty="0" err="1"/>
+              <a:t>Efektivitas</a:t>
+            </a:r>
+            <a:r>
+              <a:rPr sz="1300" dirty="0"/>
+              <a:t> WhatsApp Gateway</a:t>
             </a:r>
           </a:p>
           <a:p>
@@ -7508,7 +9163,52 @@
               </a:defRPr>
             </a:pPr>
             <a:r>
-              <a:t>Notifikasi proaktif H-5 &amp; H-2 berhasil meminimalkan keterlambatan pengumpulan.</a:t>
+              <a:rPr sz="1200" dirty="0" err="1"/>
+              <a:t>Notifikasi</a:t>
+            </a:r>
+            <a:r>
+              <a:rPr sz="1200" dirty="0"/>
+              <a:t> </a:t>
+            </a:r>
+            <a:r>
+              <a:rPr sz="1200" dirty="0" err="1"/>
+              <a:t>proaktif</a:t>
+            </a:r>
+            <a:r>
+              <a:rPr sz="1200" dirty="0"/>
+              <a:t> H-5 &amp; H-2 </a:t>
+            </a:r>
+            <a:r>
+              <a:rPr sz="1200" dirty="0" err="1"/>
+              <a:t>berhasil</a:t>
+            </a:r>
+            <a:r>
+              <a:rPr sz="1200" dirty="0"/>
+              <a:t> </a:t>
+            </a:r>
+            <a:r>
+              <a:rPr sz="1200" dirty="0" err="1"/>
+              <a:t>meminimalkan</a:t>
+            </a:r>
+            <a:r>
+              <a:rPr sz="1200" dirty="0"/>
+              <a:t> </a:t>
+            </a:r>
+            <a:r>
+              <a:rPr sz="1200" dirty="0" err="1"/>
+              <a:t>keterlambatan</a:t>
+            </a:r>
+            <a:r>
+              <a:rPr sz="1200" dirty="0"/>
+              <a:t> </a:t>
+            </a:r>
+            <a:r>
+              <a:rPr sz="1200" dirty="0" err="1"/>
+              <a:t>pengumpulan</a:t>
+            </a:r>
+            <a:r>
+              <a:rPr dirty="0"/>
+              <a:t>.</a:t>
             </a:r>
           </a:p>
         </p:txBody>
@@ -7549,7 +9249,7 @@
           </a:fontRef>
         </p:style>
         <p:txBody>
-          <a:bodyPr rtlCol="0" anchor="ctr" wrap="none" lIns="0" rIns="0" tIns="0" bIns="0"/>
+          <a:bodyPr wrap="none" lIns="0" tIns="0" rIns="0" bIns="0" rtlCol="0" anchor="ctr"/>
           <a:lstStyle/>
           <a:p>
             <a:pPr algn="ctr">
@@ -7575,7 +9275,7 @@
         <p:spPr>
           <a:xfrm>
             <a:off x="1508760" y="3886200"/>
-            <a:ext cx="4572000" cy="914400"/>
+            <a:ext cx="4572000" cy="641201"/>
           </a:xfrm>
           <a:prstGeom prst="rect">
             <a:avLst/>
@@ -7583,21 +9283,31 @@
           <a:noFill/>
         </p:spPr>
         <p:txBody>
-          <a:bodyPr wrap="square" lIns="0" rIns="0" tIns="0">
+          <a:bodyPr wrap="square" lIns="0" tIns="0" rIns="0">
             <a:spAutoFit/>
           </a:bodyPr>
           <a:lstStyle/>
           <a:p>
             <a:pPr>
-              <a:defRPr b="1" sz="1150">
+              <a:defRPr sz="1150" b="1">
                 <a:solidFill>
                   <a:srgbClr val="1A1A2E"/>
                 </a:solidFill>
               </a:defRPr>
             </a:pPr>
             <a:r>
-              <a:t>Kemudahan Pengawasan</a:t>
-            </a:r>
+              <a:rPr sz="1300" dirty="0" err="1"/>
+              <a:t>Kemudahan</a:t>
+            </a:r>
+            <a:r>
+              <a:rPr sz="1300" dirty="0"/>
+              <a:t> </a:t>
+            </a:r>
+            <a:r>
+              <a:rPr sz="1300" dirty="0" err="1"/>
+              <a:t>Pengawasan</a:t>
+            </a:r>
+            <a:endParaRPr sz="1300" dirty="0"/>
           </a:p>
           <a:p>
             <a:pPr>
@@ -7611,7 +9321,32 @@
               </a:defRPr>
             </a:pPr>
             <a:r>
-              <a:t>Dasbor admin mempermudah monitor progres tugas real-time &amp; audit activity trail.</a:t>
+              <a:rPr sz="1200" dirty="0"/>
+              <a:t>Dasbor admin </a:t>
+            </a:r>
+            <a:r>
+              <a:rPr sz="1200" dirty="0" err="1"/>
+              <a:t>mempermudah</a:t>
+            </a:r>
+            <a:r>
+              <a:rPr sz="1200" dirty="0"/>
+              <a:t> monitor </a:t>
+            </a:r>
+            <a:r>
+              <a:rPr sz="1200" dirty="0" err="1"/>
+              <a:t>progres</a:t>
+            </a:r>
+            <a:r>
+              <a:rPr sz="1200" dirty="0"/>
+              <a:t> </a:t>
+            </a:r>
+            <a:r>
+              <a:rPr sz="1200" dirty="0" err="1"/>
+              <a:t>tugas</a:t>
+            </a:r>
+            <a:r>
+              <a:rPr sz="1200" dirty="0"/>
+              <a:t> real-time &amp; audit activity trail.</a:t>
             </a:r>
           </a:p>
         </p:txBody>
@@ -7652,7 +9387,7 @@
           </a:fontRef>
         </p:style>
         <p:txBody>
-          <a:bodyPr rtlCol="0" anchor="ctr" wrap="none" lIns="0" rIns="0" tIns="0" bIns="0"/>
+          <a:bodyPr wrap="none" lIns="0" tIns="0" rIns="0" bIns="0" rtlCol="0" anchor="ctr"/>
           <a:lstStyle/>
           <a:p>
             <a:pPr algn="ctr">
@@ -7678,7 +9413,7 @@
         <p:spPr>
           <a:xfrm>
             <a:off x="1508760" y="4892040"/>
-            <a:ext cx="4572000" cy="914400"/>
+            <a:ext cx="4572000" cy="641201"/>
           </a:xfrm>
           <a:prstGeom prst="rect">
             <a:avLst/>
@@ -7686,21 +9421,35 @@
           <a:noFill/>
         </p:spPr>
         <p:txBody>
-          <a:bodyPr wrap="square" lIns="0" rIns="0" tIns="0">
+          <a:bodyPr wrap="square" lIns="0" tIns="0" rIns="0">
             <a:spAutoFit/>
           </a:bodyPr>
           <a:lstStyle/>
           <a:p>
             <a:pPr>
-              <a:defRPr b="1" sz="1150">
+              <a:defRPr sz="1150" b="1">
                 <a:solidFill>
                   <a:srgbClr val="1A1A2E"/>
                 </a:solidFill>
               </a:defRPr>
             </a:pPr>
             <a:r>
-              <a:t>Pusat Bantuan Terpadu</a:t>
-            </a:r>
+              <a:rPr sz="1300" dirty="0"/>
+              <a:t>Pusat </a:t>
+            </a:r>
+            <a:r>
+              <a:rPr sz="1300" dirty="0" err="1"/>
+              <a:t>Bantuan</a:t>
+            </a:r>
+            <a:r>
+              <a:rPr sz="1300" dirty="0"/>
+              <a:t> </a:t>
+            </a:r>
+            <a:r>
+              <a:rPr sz="1300" dirty="0" err="1"/>
+              <a:t>Terpadu</a:t>
+            </a:r>
+            <a:endParaRPr sz="1300" dirty="0"/>
           </a:p>
           <a:p>
             <a:pPr>
@@ -7714,7 +9463,56 @@
               </a:defRPr>
             </a:pPr>
             <a:r>
-              <a:t>Fitur Direct Help Center WA mempercepat penyelesaian aduan kendala dari mahasiswa.</a:t>
+              <a:rPr sz="1200" dirty="0"/>
+              <a:t>Fitur Direct Help Center WA </a:t>
+            </a:r>
+            <a:r>
+              <a:rPr sz="1200" dirty="0" err="1"/>
+              <a:t>mempercepat</a:t>
+            </a:r>
+            <a:r>
+              <a:rPr sz="1200" dirty="0"/>
+              <a:t> </a:t>
+            </a:r>
+            <a:r>
+              <a:rPr sz="1200" dirty="0" err="1"/>
+              <a:t>penyelesaian</a:t>
+            </a:r>
+            <a:r>
+              <a:rPr sz="1200" dirty="0"/>
+              <a:t> </a:t>
+            </a:r>
+            <a:r>
+              <a:rPr sz="1200" dirty="0" err="1"/>
+              <a:t>aduan</a:t>
+            </a:r>
+            <a:r>
+              <a:rPr sz="1200" dirty="0"/>
+              <a:t> </a:t>
+            </a:r>
+            <a:r>
+              <a:rPr sz="1200" dirty="0" err="1"/>
+              <a:t>kendala</a:t>
+            </a:r>
+            <a:r>
+              <a:rPr sz="1200" dirty="0"/>
+              <a:t> </a:t>
+            </a:r>
+            <a:r>
+              <a:rPr sz="1200" dirty="0" err="1"/>
+              <a:t>dari</a:t>
+            </a:r>
+            <a:r>
+              <a:rPr sz="1200" dirty="0"/>
+              <a:t> </a:t>
+            </a:r>
+            <a:r>
+              <a:rPr sz="1200" dirty="0" err="1"/>
+              <a:t>mahasiswa</a:t>
+            </a:r>
+            <a:r>
+              <a:rPr sz="1200" dirty="0"/>
+              <a:t>.</a:t>
             </a:r>
           </a:p>
         </p:txBody>
@@ -7761,6 +9559,7 @@
           <a:lstStyle/>
           <a:p>
             <a:pPr algn="ctr"/>
+            <a:endParaRPr/>
           </a:p>
         </p:txBody>
       </p:sp>
@@ -7800,7 +9599,7 @@
           </a:fontRef>
         </p:style>
         <p:txBody>
-          <a:bodyPr rtlCol="0" anchor="ctr" wrap="none" lIns="0" rIns="0" tIns="0" bIns="0"/>
+          <a:bodyPr wrap="none" lIns="0" tIns="0" rIns="0" bIns="0" rtlCol="0" anchor="ctr"/>
           <a:lstStyle/>
           <a:p>
             <a:pPr algn="ctr">
@@ -7834,7 +9633,7 @@
           <a:noFill/>
         </p:spPr>
         <p:txBody>
-          <a:bodyPr wrap="none" lIns="0" rIns="0" tIns="0">
+          <a:bodyPr wrap="none" lIns="0" tIns="0" rIns="0">
             <a:spAutoFit/>
           </a:bodyPr>
           <a:lstStyle/>
@@ -7860,8 +9659,8 @@
         </p:nvSpPr>
         <p:spPr>
           <a:xfrm>
-            <a:off x="7589520" y="1828800"/>
-            <a:ext cx="2651760" cy="3474720"/>
+            <a:off x="6858000" y="1837426"/>
+            <a:ext cx="4198620" cy="3474720"/>
           </a:xfrm>
           <a:prstGeom prst="roundRect">
             <a:avLst/>
@@ -7892,12 +9691,117 @@
           <a:lstStyle/>
           <a:p>
             <a:pPr algn="ctr"/>
+            <a:endParaRPr/>
+          </a:p>
+        </p:txBody>
+      </p:sp>
+      <p:sp>
+        <p:nvSpPr>
+          <p:cNvPr id="24" name="Rounded Rectangle 23"/>
+          <p:cNvSpPr/>
+          <p:nvPr/>
+        </p:nvSpPr>
+        <p:spPr>
+          <a:xfrm>
+            <a:off x="8451342" y="1874520"/>
+            <a:ext cx="928115" cy="104241"/>
+          </a:xfrm>
+          <a:prstGeom prst="roundRect">
+            <a:avLst/>
+          </a:prstGeom>
+          <a:solidFill>
+            <a:srgbClr val="000000"/>
+          </a:solidFill>
+          <a:ln>
+            <a:noFill/>
+          </a:ln>
+        </p:spPr>
+        <p:style>
+          <a:lnRef idx="1">
+            <a:schemeClr val="accent1"/>
+          </a:lnRef>
+          <a:fillRef idx="3">
+            <a:schemeClr val="accent1"/>
+          </a:fillRef>
+          <a:effectRef idx="2">
+            <a:schemeClr val="accent1"/>
+          </a:effectRef>
+          <a:fontRef idx="minor">
+            <a:schemeClr val="lt1"/>
+          </a:fontRef>
+        </p:style>
+        <p:txBody>
+          <a:bodyPr rtlCol="0" anchor="ctr"/>
+          <a:lstStyle/>
+          <a:p>
+            <a:pPr algn="ctr"/>
+            <a:endParaRPr/>
+          </a:p>
+        </p:txBody>
+      </p:sp>
+      <p:sp>
+        <p:nvSpPr>
+          <p:cNvPr id="25" name="Rounded Rectangle 24"/>
+          <p:cNvSpPr/>
+          <p:nvPr/>
+        </p:nvSpPr>
+        <p:spPr>
+          <a:xfrm>
+            <a:off x="6745856" y="5440680"/>
+            <a:ext cx="4310763" cy="411480"/>
+          </a:xfrm>
+          <a:prstGeom prst="roundRect">
+            <a:avLst/>
+          </a:prstGeom>
+          <a:solidFill>
+            <a:srgbClr val="E91E63"/>
+          </a:solidFill>
+          <a:ln>
+            <a:noFill/>
+          </a:ln>
+        </p:spPr>
+        <p:style>
+          <a:lnRef idx="1">
+            <a:schemeClr val="accent1"/>
+          </a:lnRef>
+          <a:fillRef idx="3">
+            <a:schemeClr val="accent1"/>
+          </a:fillRef>
+          <a:effectRef idx="2">
+            <a:schemeClr val="accent1"/>
+          </a:effectRef>
+          <a:fontRef idx="minor">
+            <a:schemeClr val="lt1"/>
+          </a:fontRef>
+        </p:style>
+        <p:txBody>
+          <a:bodyPr wrap="square" rtlCol="0" anchor="ctr"/>
+          <a:lstStyle/>
+          <a:p>
+            <a:pPr algn="ctr">
+              <a:defRPr sz="950" b="1">
+                <a:solidFill>
+                  <a:srgbClr val="FFFFFF"/>
+                </a:solidFill>
+                <a:latin typeface="Arial"/>
+              </a:defRPr>
+            </a:pPr>
+            <a:r>
+              <a:rPr dirty="0"/>
+              <a:t>WHATSAPP GATEWAY INTEGRATED - FONNTE API VERIFIED</a:t>
+            </a:r>
           </a:p>
         </p:txBody>
       </p:sp>
       <p:pic>
         <p:nvPicPr>
-          <p:cNvPr id="23" name="Picture 22" descr="wa_reminder.jpg"/>
+          <p:cNvPr id="27" name="Picture 26">
+            <a:extLst>
+              <a:ext uri="{FF2B5EF4-FFF2-40B4-BE49-F238E27FC236}">
+                <a16:creationId xmlns:a16="http://schemas.microsoft.com/office/drawing/2014/main" id="{801A183E-74DF-8D67-098C-221CF6CF51D9}"/>
+              </a:ext>
+            </a:extLst>
+          </p:cNvPr>
           <p:cNvPicPr>
             <a:picLocks noChangeAspect="1"/>
           </p:cNvPicPr>
@@ -7911,115 +9815,14 @@
         </p:blipFill>
         <p:spPr>
           <a:xfrm>
-            <a:off x="7695590" y="1933041"/>
-            <a:ext cx="2439619" cy="3266236"/>
+            <a:off x="6880860" y="2407432"/>
+            <a:ext cx="4114800" cy="2119969"/>
           </a:xfrm>
           <a:prstGeom prst="rect">
             <a:avLst/>
           </a:prstGeom>
-          <a:ln w="12700">
-            <a:solidFill>
-              <a:srgbClr val="E91E63"/>
-            </a:solidFill>
-          </a:ln>
         </p:spPr>
       </p:pic>
-      <p:sp>
-        <p:nvSpPr>
-          <p:cNvPr id="24" name="Rounded Rectangle 23"/>
-          <p:cNvSpPr/>
-          <p:nvPr/>
-        </p:nvSpPr>
-        <p:spPr>
-          <a:xfrm>
-            <a:off x="8451342" y="1874520"/>
-            <a:ext cx="928115" cy="104241"/>
-          </a:xfrm>
-          <a:prstGeom prst="roundRect">
-            <a:avLst/>
-          </a:prstGeom>
-          <a:solidFill>
-            <a:srgbClr val="000000"/>
-          </a:solidFill>
-          <a:ln>
-            <a:noFill/>
-          </a:ln>
-        </p:spPr>
-        <p:style>
-          <a:lnRef idx="1">
-            <a:schemeClr val="accent1"/>
-          </a:lnRef>
-          <a:fillRef idx="3">
-            <a:schemeClr val="accent1"/>
-          </a:fillRef>
-          <a:effectRef idx="2">
-            <a:schemeClr val="accent1"/>
-          </a:effectRef>
-          <a:fontRef idx="minor">
-            <a:schemeClr val="lt1"/>
-          </a:fontRef>
-        </p:style>
-        <p:txBody>
-          <a:bodyPr rtlCol="0" anchor="ctr"/>
-          <a:lstStyle/>
-          <a:p>
-            <a:pPr algn="ctr"/>
-          </a:p>
-        </p:txBody>
-      </p:sp>
-      <p:sp>
-        <p:nvSpPr>
-          <p:cNvPr id="25" name="Rounded Rectangle 24"/>
-          <p:cNvSpPr/>
-          <p:nvPr/>
-        </p:nvSpPr>
-        <p:spPr>
-          <a:xfrm>
-            <a:off x="6675120" y="5440680"/>
-            <a:ext cx="4480560" cy="411480"/>
-          </a:xfrm>
-          <a:prstGeom prst="roundRect">
-            <a:avLst/>
-          </a:prstGeom>
-          <a:solidFill>
-            <a:srgbClr val="E91E63"/>
-          </a:solidFill>
-          <a:ln>
-            <a:noFill/>
-          </a:ln>
-        </p:spPr>
-        <p:style>
-          <a:lnRef idx="1">
-            <a:schemeClr val="accent1"/>
-          </a:lnRef>
-          <a:fillRef idx="3">
-            <a:schemeClr val="accent1"/>
-          </a:fillRef>
-          <a:effectRef idx="2">
-            <a:schemeClr val="accent1"/>
-          </a:effectRef>
-          <a:fontRef idx="minor">
-            <a:schemeClr val="lt1"/>
-          </a:fontRef>
-        </p:style>
-        <p:txBody>
-          <a:bodyPr rtlCol="0" anchor="ctr" wrap="square"/>
-          <a:lstStyle/>
-          <a:p>
-            <a:pPr algn="ctr">
-              <a:defRPr sz="950" b="1">
-                <a:solidFill>
-                  <a:srgbClr val="FFFFFF"/>
-                </a:solidFill>
-                <a:latin typeface="Arial"/>
-              </a:defRPr>
-            </a:pPr>
-            <a:r>
-              <a:t>WHATSAPP GATEWAY INTEGRATED - FONNTE API VERIFIED</a:t>
-            </a:r>
-          </a:p>
-        </p:txBody>
-      </p:sp>
     </p:spTree>
   </p:cSld>
   <p:clrMapOvr>
